--- a/1.0 Seasonal adjustment.pptx
+++ b/1.0 Seasonal adjustment.pptx
@@ -22,7 +22,7 @@
     <p:sldId id="292" r:id="rId13"/>
     <p:sldId id="293" r:id="rId14"/>
     <p:sldId id="299" r:id="rId15"/>
-    <p:sldId id="300" r:id="rId16"/>
+    <p:sldId id="305" r:id="rId16"/>
     <p:sldId id="294" r:id="rId17"/>
     <p:sldId id="296" r:id="rId18"/>
     <p:sldId id="301" r:id="rId19"/>
@@ -8326,7 +8326,7 @@
           <a:p>
             <a:fld id="{0CBFB8CE-488C-4A7E-87F2-3AF6127C51C1}" type="datetimeFigureOut">
               <a:rPr lang="en-IE" smtClean="0"/>
-              <a:t>17/09/2026</a:t>
+              <a:t>01/10/2026</a:t>
             </a:fld>
             <a:endParaRPr lang="en-IE"/>
           </a:p>
@@ -10673,8 +10673,8 @@
         </p:nvSpPr>
         <p:spPr>
           <a:xfrm>
-            <a:off x="970722" y="1901951"/>
-            <a:ext cx="10515597" cy="4194176"/>
+            <a:off x="970722" y="1414736"/>
+            <a:ext cx="10515597" cy="4681391"/>
           </a:xfrm>
         </p:spPr>
         <p:txBody>
@@ -13661,7 +13661,7 @@
     <p:sldLayoutId id="2147483723" r:id="rId5"/>
     <p:sldLayoutId id="2147483728" r:id="rId6"/>
   </p:sldLayoutIdLst>
-  <p:hf sldNum="0" hdr="0" dt="0"/>
+  <p:hf hdr="0" dt="0"/>
   <p:txStyles>
     <p:titleStyle>
       <a:defPPr marR="0" lvl="0" algn="l" rtl="0">
@@ -14427,6 +14427,10 @@
           <a:lstStyle/>
           <a:p>
             <a:r>
+              <a:rPr lang="en-GB" noProof="0"/>
+              <a:t>1 </a:t>
+            </a:r>
+            <a:r>
               <a:rPr lang="en-GB" noProof="0" dirty="0"/>
               <a:t>Seasonal adjustment</a:t>
             </a:r>
@@ -14524,6 +14528,73 @@
       </p:sp>
       <p:sp>
         <p:nvSpPr>
+          <p:cNvPr id="3" name="Espace réservé du numéro de diapositive 2">
+            <a:extLst>
+              <a:ext uri="{FF2B5EF4-FFF2-40B4-BE49-F238E27FC236}">
+                <a16:creationId xmlns:a16="http://schemas.microsoft.com/office/drawing/2014/main" id="{23F21E1F-E55C-9AB2-D397-F7FFE88CE998}"/>
+              </a:ext>
+            </a:extLst>
+          </p:cNvPr>
+          <p:cNvSpPr>
+            <a:spLocks noGrp="1"/>
+          </p:cNvSpPr>
+          <p:nvPr>
+            <p:ph type="sldNum" idx="12"/>
+          </p:nvPr>
+        </p:nvSpPr>
+        <p:spPr>
+          <a:xfrm>
+            <a:off x="4479851" y="6079285"/>
+            <a:ext cx="2743200" cy="365125"/>
+          </a:xfrm>
+        </p:spPr>
+        <p:txBody>
+          <a:bodyPr/>
+          <a:lstStyle/>
+          <a:p>
+            <a:fld id="{1E1EA8E3-33CC-465E-BBDB-C5F5B41B1D80}" type="slidenum">
+              <a:rPr lang="en-GB" smtClean="0"/>
+              <a:t>10</a:t>
+            </a:fld>
+            <a:endParaRPr lang="en-GB"/>
+          </a:p>
+        </p:txBody>
+      </p:sp>
+      <p:sp>
+        <p:nvSpPr>
+          <p:cNvPr id="56" name="Footer Placeholder 55">
+            <a:extLst>
+              <a:ext uri="{FF2B5EF4-FFF2-40B4-BE49-F238E27FC236}">
+                <a16:creationId xmlns:a16="http://schemas.microsoft.com/office/drawing/2014/main" id="{5A528134-9E0C-98C2-DC05-EE5161233B25}"/>
+              </a:ext>
+            </a:extLst>
+          </p:cNvPr>
+          <p:cNvSpPr>
+            <a:spLocks noGrp="1"/>
+          </p:cNvSpPr>
+          <p:nvPr>
+            <p:ph type="ftr" sz="quarter" idx="4294967295"/>
+          </p:nvPr>
+        </p:nvSpPr>
+        <p:spPr>
+          <a:xfrm>
+            <a:off x="0" y="0"/>
+            <a:ext cx="0" cy="0"/>
+          </a:xfrm>
+        </p:spPr>
+        <p:txBody>
+          <a:bodyPr/>
+          <a:lstStyle/>
+          <a:p>
+            <a:r>
+              <a:rPr lang="en-GB" noProof="0" dirty="0"/>
+              <a:t>ESTP Training. Seasonal adjustment</a:t>
+            </a:r>
+          </a:p>
+        </p:txBody>
+      </p:sp>
+      <p:sp>
+        <p:nvSpPr>
           <p:cNvPr id="5" name="Rectangle: Rounded Corners 4">
             <a:extLst>
               <a:ext uri="{FF2B5EF4-FFF2-40B4-BE49-F238E27FC236}">
@@ -14536,7 +14607,7 @@
         </p:nvSpPr>
         <p:spPr>
           <a:xfrm>
-            <a:off x="2518618" y="1708602"/>
+            <a:off x="2274069" y="1350556"/>
             <a:ext cx="2869035" cy="469783"/>
           </a:xfrm>
           <a:prstGeom prst="roundRect">
@@ -14585,7 +14656,7 @@
         </p:nvSpPr>
         <p:spPr>
           <a:xfrm>
-            <a:off x="8545227" y="1682116"/>
+            <a:off x="8300678" y="1324070"/>
             <a:ext cx="2869035" cy="469783"/>
           </a:xfrm>
           <a:prstGeom prst="roundRect">
@@ -14634,7 +14705,7 @@
         </p:nvSpPr>
         <p:spPr>
           <a:xfrm>
-            <a:off x="3472806" y="2702610"/>
+            <a:off x="3228257" y="2344564"/>
             <a:ext cx="1291131" cy="675315"/>
           </a:xfrm>
           <a:prstGeom prst="ellipse">
@@ -14681,7 +14752,7 @@
         </p:nvSpPr>
         <p:spPr>
           <a:xfrm>
-            <a:off x="3467916" y="3971812"/>
+            <a:off x="3223367" y="3613766"/>
             <a:ext cx="1296544" cy="675315"/>
           </a:xfrm>
           <a:prstGeom prst="roundRect">
@@ -14730,7 +14801,7 @@
         </p:nvSpPr>
         <p:spPr>
           <a:xfrm>
-            <a:off x="4768820" y="2690935"/>
+            <a:off x="4524271" y="2332889"/>
             <a:ext cx="1698814" cy="675315"/>
           </a:xfrm>
           <a:prstGeom prst="ellipse">
@@ -14777,7 +14848,7 @@
         </p:nvSpPr>
         <p:spPr>
           <a:xfrm>
-            <a:off x="380018" y="2714285"/>
+            <a:off x="135469" y="2356239"/>
             <a:ext cx="1449717" cy="675315"/>
           </a:xfrm>
           <a:prstGeom prst="ellipse">
@@ -14824,7 +14895,7 @@
         </p:nvSpPr>
         <p:spPr>
           <a:xfrm>
-            <a:off x="616688" y="4270578"/>
+            <a:off x="372139" y="3912532"/>
             <a:ext cx="974491" cy="675315"/>
           </a:xfrm>
           <a:prstGeom prst="roundRect">
@@ -14873,7 +14944,7 @@
         </p:nvSpPr>
         <p:spPr>
           <a:xfrm>
-            <a:off x="4947782" y="4010107"/>
+            <a:off x="4703233" y="3652061"/>
             <a:ext cx="1296544" cy="675315"/>
           </a:xfrm>
           <a:prstGeom prst="roundRect">
@@ -14926,7 +14997,7 @@
         </p:nvCxnSpPr>
         <p:spPr>
           <a:xfrm rot="16200000" flipH="1">
-            <a:off x="3773642" y="2357879"/>
+            <a:off x="3529093" y="1999833"/>
             <a:ext cx="524225" cy="165236"/>
           </a:xfrm>
           <a:prstGeom prst="bentConnector3">
@@ -14969,7 +15040,7 @@
         </p:nvCxnSpPr>
         <p:spPr>
           <a:xfrm rot="5400000">
-            <a:off x="2261057" y="1022206"/>
+            <a:off x="2016508" y="664160"/>
             <a:ext cx="535900" cy="2848259"/>
           </a:xfrm>
           <a:prstGeom prst="bentConnector3">
@@ -15014,7 +15085,7 @@
         </p:nvCxnSpPr>
         <p:spPr>
           <a:xfrm rot="16200000" flipH="1">
-            <a:off x="4529406" y="1602114"/>
+            <a:off x="4284857" y="1244068"/>
             <a:ext cx="512550" cy="1665091"/>
           </a:xfrm>
           <a:prstGeom prst="bentConnector3">
@@ -15053,7 +15124,7 @@
         </p:nvSpPr>
         <p:spPr>
           <a:xfrm>
-            <a:off x="7442624" y="2617345"/>
+            <a:off x="7198075" y="2259299"/>
             <a:ext cx="1862817" cy="675315"/>
           </a:xfrm>
           <a:prstGeom prst="ellipse">
@@ -15100,7 +15171,7 @@
         </p:nvSpPr>
         <p:spPr>
           <a:xfrm>
-            <a:off x="10313196" y="2622661"/>
+            <a:off x="10068647" y="2264615"/>
             <a:ext cx="1683391" cy="675315"/>
           </a:xfrm>
           <a:prstGeom prst="ellipse">
@@ -15151,7 +15222,7 @@
         </p:nvCxnSpPr>
         <p:spPr>
           <a:xfrm rot="5400000">
-            <a:off x="8944166" y="1581766"/>
+            <a:off x="8699617" y="1223720"/>
             <a:ext cx="465446" cy="1605712"/>
           </a:xfrm>
           <a:prstGeom prst="bentConnector3">
@@ -15196,7 +15267,7 @@
         </p:nvCxnSpPr>
         <p:spPr>
           <a:xfrm rot="16200000" flipH="1">
-            <a:off x="10331937" y="1799706"/>
+            <a:off x="10087388" y="1441660"/>
             <a:ext cx="470762" cy="1175147"/>
           </a:xfrm>
           <a:prstGeom prst="bentConnector3">
@@ -15241,7 +15312,7 @@
         </p:nvCxnSpPr>
         <p:spPr>
           <a:xfrm rot="5400000">
-            <a:off x="663917" y="3829618"/>
+            <a:off x="419368" y="3471572"/>
             <a:ext cx="880978" cy="943"/>
           </a:xfrm>
           <a:prstGeom prst="bentConnector3">
@@ -15286,7 +15357,7 @@
         </p:nvCxnSpPr>
         <p:spPr>
           <a:xfrm rot="5400000">
-            <a:off x="3820337" y="3673776"/>
+            <a:off x="3575788" y="3315730"/>
             <a:ext cx="593887" cy="2184"/>
           </a:xfrm>
           <a:prstGeom prst="bentConnector3">
@@ -15331,7 +15402,7 @@
         </p:nvCxnSpPr>
         <p:spPr>
           <a:xfrm rot="5400000">
-            <a:off x="5285213" y="3677092"/>
+            <a:off x="5040664" y="3319046"/>
             <a:ext cx="643857" cy="22173"/>
           </a:xfrm>
           <a:prstGeom prst="bentConnector3">
@@ -15372,7 +15443,7 @@
         </p:nvSpPr>
         <p:spPr>
           <a:xfrm>
-            <a:off x="6579257" y="3708565"/>
+            <a:off x="6334708" y="3350519"/>
             <a:ext cx="1876731" cy="805800"/>
           </a:xfrm>
           <a:prstGeom prst="roundRect">
@@ -15427,7 +15498,7 @@
         </p:nvSpPr>
         <p:spPr>
           <a:xfrm>
-            <a:off x="8514314" y="3708563"/>
+            <a:off x="8269765" y="3350517"/>
             <a:ext cx="1876737" cy="1720814"/>
           </a:xfrm>
           <a:prstGeom prst="roundRect">
@@ -15474,7 +15545,7 @@
         </p:nvSpPr>
         <p:spPr>
           <a:xfrm>
-            <a:off x="6579257" y="4779892"/>
+            <a:off x="6334708" y="4421846"/>
             <a:ext cx="1876737" cy="805800"/>
           </a:xfrm>
           <a:prstGeom prst="roundRect">
@@ -15527,7 +15598,7 @@
         </p:nvSpPr>
         <p:spPr>
           <a:xfrm>
-            <a:off x="8159984" y="5900138"/>
+            <a:off x="7915435" y="5542092"/>
             <a:ext cx="1876737" cy="805800"/>
           </a:xfrm>
           <a:prstGeom prst="roundRect">
@@ -15587,7 +15658,7 @@
         </p:nvSpPr>
         <p:spPr>
           <a:xfrm>
-            <a:off x="4965960" y="5346633"/>
+            <a:off x="4721411" y="4988587"/>
             <a:ext cx="1262507" cy="675315"/>
           </a:xfrm>
           <a:prstGeom prst="roundRect">
@@ -15643,7 +15714,7 @@
         </p:nvCxnSpPr>
         <p:spPr>
           <a:xfrm rot="5400000">
-            <a:off x="7737876" y="3072407"/>
+            <a:off x="7493327" y="2714361"/>
             <a:ext cx="415905" cy="856410"/>
           </a:xfrm>
           <a:prstGeom prst="bentConnector3">
@@ -15688,7 +15759,7 @@
         </p:nvCxnSpPr>
         <p:spPr>
           <a:xfrm rot="16200000" flipH="1">
-            <a:off x="8705407" y="2961286"/>
+            <a:off x="8460858" y="2603240"/>
             <a:ext cx="415903" cy="1078650"/>
           </a:xfrm>
           <a:prstGeom prst="bentConnector3">
@@ -15733,7 +15804,7 @@
         </p:nvCxnSpPr>
         <p:spPr>
           <a:xfrm rot="16200000" flipH="1">
-            <a:off x="7384861" y="4647126"/>
+            <a:off x="7140312" y="4289080"/>
             <a:ext cx="265527" cy="3"/>
           </a:xfrm>
           <a:prstGeom prst="bentConnector3">
@@ -15778,7 +15849,7 @@
         </p:nvCxnSpPr>
         <p:spPr>
           <a:xfrm rot="16200000" flipH="1">
-            <a:off x="5266029" y="5015447"/>
+            <a:off x="5021480" y="4657401"/>
             <a:ext cx="661211" cy="1160"/>
           </a:xfrm>
           <a:prstGeom prst="bentConnector3">
@@ -15823,7 +15894,7 @@
         </p:nvCxnSpPr>
         <p:spPr>
           <a:xfrm flipH="1">
-            <a:off x="9098353" y="5429377"/>
+            <a:off x="8853804" y="5071331"/>
             <a:ext cx="354330" cy="470761"/>
           </a:xfrm>
           <a:prstGeom prst="straightConnector1">
@@ -15866,7 +15937,7 @@
         </p:nvCxnSpPr>
         <p:spPr>
           <a:xfrm flipH="1">
-            <a:off x="5597214" y="4111465"/>
+            <a:off x="5352665" y="3753419"/>
             <a:ext cx="982043" cy="1235168"/>
           </a:xfrm>
           <a:prstGeom prst="straightConnector1">
@@ -15905,7 +15976,7 @@
         </p:nvSpPr>
         <p:spPr>
           <a:xfrm>
-            <a:off x="6111934" y="6063319"/>
+            <a:off x="5867385" y="5705273"/>
             <a:ext cx="1556070" cy="675315"/>
           </a:xfrm>
           <a:prstGeom prst="roundRect">
@@ -15963,7 +16034,7 @@
         </p:nvSpPr>
         <p:spPr>
           <a:xfrm>
-            <a:off x="10426214" y="5393619"/>
+            <a:off x="10181665" y="5035573"/>
             <a:ext cx="1191234" cy="838496"/>
           </a:xfrm>
           <a:prstGeom prst="roundRect">
@@ -16044,7 +16115,7 @@
         </p:nvCxnSpPr>
         <p:spPr>
           <a:xfrm flipH="1">
-            <a:off x="6889969" y="5585692"/>
+            <a:off x="6645420" y="5227646"/>
             <a:ext cx="627657" cy="477627"/>
           </a:xfrm>
           <a:prstGeom prst="straightConnector1">
@@ -16087,7 +16158,7 @@
         </p:nvCxnSpPr>
         <p:spPr>
           <a:xfrm>
-            <a:off x="10391051" y="4568970"/>
+            <a:off x="10146502" y="4210924"/>
             <a:ext cx="630780" cy="824649"/>
           </a:xfrm>
           <a:prstGeom prst="straightConnector1">
@@ -16130,7 +16201,7 @@
         </p:nvCxnSpPr>
         <p:spPr>
           <a:xfrm>
-            <a:off x="7517626" y="5585692"/>
+            <a:off x="7273077" y="5227646"/>
             <a:ext cx="1580727" cy="314446"/>
           </a:xfrm>
           <a:prstGeom prst="straightConnector1">
@@ -16173,7 +16244,7 @@
         </p:nvCxnSpPr>
         <p:spPr>
           <a:xfrm flipH="1">
-            <a:off x="7668004" y="6303038"/>
+            <a:off x="7423455" y="5944992"/>
             <a:ext cx="491980" cy="97939"/>
           </a:xfrm>
           <a:prstGeom prst="straightConnector1">
@@ -16217,7 +16288,7 @@
         </p:nvCxnSpPr>
         <p:spPr>
           <a:xfrm flipV="1">
-            <a:off x="10036721" y="5812867"/>
+            <a:off x="9792172" y="5454821"/>
             <a:ext cx="389493" cy="490171"/>
           </a:xfrm>
           <a:prstGeom prst="straightConnector1">
@@ -16245,34 +16316,6 @@
       </p:cxnSp>
       <p:sp>
         <p:nvSpPr>
-          <p:cNvPr id="56" name="Footer Placeholder 55">
-            <a:extLst>
-              <a:ext uri="{FF2B5EF4-FFF2-40B4-BE49-F238E27FC236}">
-                <a16:creationId xmlns:a16="http://schemas.microsoft.com/office/drawing/2014/main" id="{5A528134-9E0C-98C2-DC05-EE5161233B25}"/>
-              </a:ext>
-            </a:extLst>
-          </p:cNvPr>
-          <p:cNvSpPr>
-            <a:spLocks noGrp="1"/>
-          </p:cNvSpPr>
-          <p:nvPr>
-            <p:ph type="ftr" sz="quarter" idx="11"/>
-          </p:nvPr>
-        </p:nvSpPr>
-        <p:spPr/>
-        <p:txBody>
-          <a:bodyPr/>
-          <a:lstStyle/>
-          <a:p>
-            <a:r>
-              <a:rPr lang="en-GB" noProof="0" dirty="0"/>
-              <a:t>ESTP Training. Seasonal adjustment</a:t>
-            </a:r>
-          </a:p>
-        </p:txBody>
-      </p:sp>
-      <p:sp>
-        <p:nvSpPr>
           <p:cNvPr id="61" name="Oval 9">
             <a:extLst>
               <a:ext uri="{FF2B5EF4-FFF2-40B4-BE49-F238E27FC236}">
@@ -16285,7 +16328,7 @@
         </p:nvSpPr>
         <p:spPr>
           <a:xfrm>
-            <a:off x="1949957" y="2694062"/>
+            <a:off x="1705408" y="2336016"/>
             <a:ext cx="1423693" cy="675315"/>
           </a:xfrm>
           <a:prstGeom prst="ellipse">
@@ -16332,7 +16375,7 @@
         </p:nvSpPr>
         <p:spPr>
           <a:xfrm>
-            <a:off x="1964423" y="3984222"/>
+            <a:off x="1719874" y="3626176"/>
             <a:ext cx="1407686" cy="675315"/>
           </a:xfrm>
           <a:prstGeom prst="roundRect">
@@ -16386,7 +16429,7 @@
         </p:nvCxnSpPr>
         <p:spPr>
           <a:xfrm rot="16200000" flipH="1">
-            <a:off x="2357613" y="3673568"/>
+            <a:off x="2113064" y="3315522"/>
             <a:ext cx="614845" cy="6462"/>
           </a:xfrm>
           <a:prstGeom prst="bentConnector3">
@@ -16431,7 +16474,7 @@
         </p:nvCxnSpPr>
         <p:spPr>
           <a:xfrm rot="5400000">
-            <a:off x="3049632" y="1790557"/>
+            <a:off x="2805083" y="1432511"/>
             <a:ext cx="515677" cy="1291332"/>
           </a:xfrm>
           <a:prstGeom prst="bentConnector3">
@@ -16472,7 +16515,7 @@
         </p:nvSpPr>
         <p:spPr>
           <a:xfrm>
-            <a:off x="11022622" y="3644268"/>
+            <a:off x="10778073" y="3286222"/>
             <a:ext cx="1191234" cy="838496"/>
           </a:xfrm>
           <a:prstGeom prst="roundRect">
@@ -16531,7 +16574,7 @@
         </p:nvSpPr>
         <p:spPr>
           <a:xfrm>
-            <a:off x="1712234" y="3457770"/>
+            <a:off x="1467685" y="3099724"/>
             <a:ext cx="9497388" cy="3331954"/>
           </a:xfrm>
           <a:prstGeom prst="roundRect">
@@ -16593,7 +16636,7 @@
         </p:nvCxnSpPr>
         <p:spPr>
           <a:xfrm>
-            <a:off x="11154892" y="3297976"/>
+            <a:off x="10910343" y="2939930"/>
             <a:ext cx="463347" cy="346292"/>
           </a:xfrm>
           <a:prstGeom prst="straightConnector1">
@@ -16684,6 +16727,35 @@
       </p:sp>
       <p:sp>
         <p:nvSpPr>
+          <p:cNvPr id="3" name="Espace réservé du numéro de diapositive 2">
+            <a:extLst>
+              <a:ext uri="{FF2B5EF4-FFF2-40B4-BE49-F238E27FC236}">
+                <a16:creationId xmlns:a16="http://schemas.microsoft.com/office/drawing/2014/main" id="{698E0F6F-73DA-F35B-E426-26D064B702AA}"/>
+              </a:ext>
+            </a:extLst>
+          </p:cNvPr>
+          <p:cNvSpPr>
+            <a:spLocks noGrp="1"/>
+          </p:cNvSpPr>
+          <p:nvPr>
+            <p:ph type="sldNum" idx="12"/>
+          </p:nvPr>
+        </p:nvSpPr>
+        <p:spPr/>
+        <p:txBody>
+          <a:bodyPr/>
+          <a:lstStyle/>
+          <a:p>
+            <a:fld id="{1E1EA8E3-33CC-465E-BBDB-C5F5B41B1D80}" type="slidenum">
+              <a:rPr lang="en-GB" smtClean="0"/>
+              <a:t>11</a:t>
+            </a:fld>
+            <a:endParaRPr lang="en-GB"/>
+          </a:p>
+        </p:txBody>
+      </p:sp>
+      <p:sp>
+        <p:nvSpPr>
           <p:cNvPr id="4" name="Espace réservé du pied de page 3">
             <a:extLst>
               <a:ext uri="{FF2B5EF4-FFF2-40B4-BE49-F238E27FC236}">
@@ -16695,10 +16767,15 @@
             <a:spLocks noGrp="1"/>
           </p:cNvSpPr>
           <p:nvPr>
-            <p:ph type="ftr" sz="quarter" idx="11"/>
+            <p:ph type="ftr" sz="quarter" idx="4294967295"/>
           </p:nvPr>
         </p:nvSpPr>
-        <p:spPr/>
+        <p:spPr>
+          <a:xfrm>
+            <a:off x="0" y="0"/>
+            <a:ext cx="0" cy="0"/>
+          </a:xfrm>
+        </p:spPr>
         <p:txBody>
           <a:bodyPr/>
           <a:lstStyle/>
@@ -16725,13 +16802,13 @@
           <p:nvPr>
             <p:extLst>
               <p:ext uri="{D42A27DB-BD31-4B8C-83A1-F6EECF244321}">
-                <p14:modId xmlns:p14="http://schemas.microsoft.com/office/powerpoint/2010/main" val="1115984761"/>
+                <p14:modId xmlns:p14="http://schemas.microsoft.com/office/powerpoint/2010/main" val="3007774434"/>
               </p:ext>
             </p:extLst>
           </p:nvPr>
         </p:nvGraphicFramePr>
         <p:xfrm>
-          <a:off x="893989" y="1524714"/>
+          <a:off x="1077048" y="1224710"/>
           <a:ext cx="10534649" cy="5219700"/>
         </p:xfrm>
         <a:graphic>
@@ -16761,7 +16838,7 @@
         <p:cNvPr id="1" name="">
           <a:extLst>
             <a:ext uri="{FF2B5EF4-FFF2-40B4-BE49-F238E27FC236}">
-              <a16:creationId xmlns:a16="http://schemas.microsoft.com/office/drawing/2014/main" id="{6DAA63BD-A130-8B4C-6FA7-785A3C8DDD60}"/>
+              <a16:creationId xmlns:a16="http://schemas.microsoft.com/office/drawing/2014/main" id="{769EDDE9-C819-D641-7AA9-6EB473363C48}"/>
             </a:ext>
           </a:extLst>
         </p:cNvPr>
@@ -16781,7 +16858,7 @@
           <p:cNvPr id="2" name="Titre 1">
             <a:extLst>
               <a:ext uri="{FF2B5EF4-FFF2-40B4-BE49-F238E27FC236}">
-                <a16:creationId xmlns:a16="http://schemas.microsoft.com/office/drawing/2014/main" id="{D64227C8-0CD0-62AE-7F56-F1D37FB15E1B}"/>
+                <a16:creationId xmlns:a16="http://schemas.microsoft.com/office/drawing/2014/main" id="{DD7FFA32-2482-1D30-2E78-3D8C44F3690A}"/>
               </a:ext>
             </a:extLst>
           </p:cNvPr>
@@ -16806,10 +16883,10 @@
       </p:sp>
       <p:sp>
         <p:nvSpPr>
-          <p:cNvPr id="4" name="Espace réservé du pied de page 3">
+          <p:cNvPr id="3" name="Espace réservé du numéro de diapositive 2">
             <a:extLst>
               <a:ext uri="{FF2B5EF4-FFF2-40B4-BE49-F238E27FC236}">
-                <a16:creationId xmlns:a16="http://schemas.microsoft.com/office/drawing/2014/main" id="{C12A91E0-CBA5-1D3D-EF7C-6839C31848F9}"/>
+                <a16:creationId xmlns:a16="http://schemas.microsoft.com/office/drawing/2014/main" id="{86D09FDB-91AD-8015-4D34-976DBFF95598}"/>
               </a:ext>
             </a:extLst>
           </p:cNvPr>
@@ -16817,10 +16894,44 @@
             <a:spLocks noGrp="1"/>
           </p:cNvSpPr>
           <p:nvPr>
-            <p:ph type="ftr" sz="quarter" idx="11"/>
+            <p:ph type="sldNum" idx="12"/>
           </p:nvPr>
         </p:nvSpPr>
         <p:spPr/>
+        <p:txBody>
+          <a:bodyPr/>
+          <a:lstStyle/>
+          <a:p>
+            <a:fld id="{1E1EA8E3-33CC-465E-BBDB-C5F5B41B1D80}" type="slidenum">
+              <a:rPr lang="en-GB" smtClean="0"/>
+              <a:t>12</a:t>
+            </a:fld>
+            <a:endParaRPr lang="en-GB"/>
+          </a:p>
+        </p:txBody>
+      </p:sp>
+      <p:sp>
+        <p:nvSpPr>
+          <p:cNvPr id="4" name="Espace réservé du pied de page 3">
+            <a:extLst>
+              <a:ext uri="{FF2B5EF4-FFF2-40B4-BE49-F238E27FC236}">
+                <a16:creationId xmlns:a16="http://schemas.microsoft.com/office/drawing/2014/main" id="{9CA002B5-4471-8187-D3FE-FAC818BD851C}"/>
+              </a:ext>
+            </a:extLst>
+          </p:cNvPr>
+          <p:cNvSpPr>
+            <a:spLocks noGrp="1"/>
+          </p:cNvSpPr>
+          <p:nvPr>
+            <p:ph type="ftr" sz="quarter" idx="4294967295"/>
+          </p:nvPr>
+        </p:nvSpPr>
+        <p:spPr>
+          <a:xfrm>
+            <a:off x="0" y="0"/>
+            <a:ext cx="0" cy="0"/>
+          </a:xfrm>
+        </p:spPr>
         <p:txBody>
           <a:bodyPr/>
           <a:lstStyle/>
@@ -16837,7 +16948,7 @@
           <p:cNvPr id="5" name="Graphique 4">
             <a:extLst>
               <a:ext uri="{FF2B5EF4-FFF2-40B4-BE49-F238E27FC236}">
-                <a16:creationId xmlns:a16="http://schemas.microsoft.com/office/drawing/2014/main" id="{4E6BAF43-564D-9AEB-0D7A-5EFCC760B4F8}"/>
+                <a16:creationId xmlns:a16="http://schemas.microsoft.com/office/drawing/2014/main" id="{87E5FEB4-2ADD-F6DC-9790-DC49FABFAF11}"/>
               </a:ext>
             </a:extLst>
           </p:cNvPr>
@@ -16847,13 +16958,13 @@
           <p:nvPr>
             <p:extLst>
               <p:ext uri="{D42A27DB-BD31-4B8C-83A1-F6EECF244321}">
-                <p14:modId xmlns:p14="http://schemas.microsoft.com/office/powerpoint/2010/main" val="592844638"/>
+                <p14:modId xmlns:p14="http://schemas.microsoft.com/office/powerpoint/2010/main" val="1852347903"/>
               </p:ext>
             </p:extLst>
           </p:nvPr>
         </p:nvGraphicFramePr>
         <p:xfrm>
-          <a:off x="893989" y="1524714"/>
+          <a:off x="1077048" y="1224710"/>
           <a:ext cx="10534649" cy="5219700"/>
         </p:xfrm>
         <a:graphic>
@@ -16865,7 +16976,7 @@
     </p:spTree>
     <p:extLst>
       <p:ext uri="{BB962C8B-B14F-4D97-AF65-F5344CB8AC3E}">
-        <p14:creationId xmlns:p14="http://schemas.microsoft.com/office/powerpoint/2010/main" val="990443262"/>
+        <p14:creationId xmlns:p14="http://schemas.microsoft.com/office/powerpoint/2010/main" val="2820402249"/>
       </p:ext>
     </p:extLst>
   </p:cSld>
@@ -16922,6 +17033,35 @@
       </p:sp>
       <p:sp>
         <p:nvSpPr>
+          <p:cNvPr id="6" name="Espace réservé du numéro de diapositive 5">
+            <a:extLst>
+              <a:ext uri="{FF2B5EF4-FFF2-40B4-BE49-F238E27FC236}">
+                <a16:creationId xmlns:a16="http://schemas.microsoft.com/office/drawing/2014/main" id="{EC0D09F5-83EB-D066-D7EA-A65AEDDC9507}"/>
+              </a:ext>
+            </a:extLst>
+          </p:cNvPr>
+          <p:cNvSpPr>
+            <a:spLocks noGrp="1"/>
+          </p:cNvSpPr>
+          <p:nvPr>
+            <p:ph type="sldNum" idx="12"/>
+          </p:nvPr>
+        </p:nvSpPr>
+        <p:spPr/>
+        <p:txBody>
+          <a:bodyPr/>
+          <a:lstStyle/>
+          <a:p>
+            <a:fld id="{1E1EA8E3-33CC-465E-BBDB-C5F5B41B1D80}" type="slidenum">
+              <a:rPr lang="en-GB" smtClean="0"/>
+              <a:t>13</a:t>
+            </a:fld>
+            <a:endParaRPr lang="en-GB"/>
+          </a:p>
+        </p:txBody>
+      </p:sp>
+      <p:sp>
+        <p:nvSpPr>
           <p:cNvPr id="3" name="Espace réservé du contenu 2">
             <a:extLst>
               <a:ext uri="{FF2B5EF4-FFF2-40B4-BE49-F238E27FC236}">
@@ -16933,15 +17073,10 @@
             <a:spLocks noGrp="1"/>
           </p:cNvSpPr>
           <p:nvPr>
-            <p:ph idx="1"/>
+            <p:ph sz="half" idx="2"/>
           </p:nvPr>
         </p:nvSpPr>
-        <p:spPr>
-          <a:xfrm>
-            <a:off x="838200" y="1811481"/>
-            <a:ext cx="10515600" cy="3881904"/>
-          </a:xfrm>
-        </p:spPr>
+        <p:spPr/>
         <p:txBody>
           <a:bodyPr/>
           <a:lstStyle/>
@@ -16966,10 +17101,15 @@
             <a:spLocks noGrp="1"/>
           </p:cNvSpPr>
           <p:nvPr>
-            <p:ph type="ftr" sz="quarter" idx="11"/>
+            <p:ph type="ftr" sz="quarter" idx="4294967295"/>
           </p:nvPr>
         </p:nvSpPr>
-        <p:spPr/>
+        <p:spPr>
+          <a:xfrm>
+            <a:off x="0" y="0"/>
+            <a:ext cx="0" cy="0"/>
+          </a:xfrm>
+        </p:spPr>
         <p:txBody>
           <a:bodyPr/>
           <a:lstStyle/>
@@ -16996,7 +17136,7 @@
           <p:nvPr>
             <p:extLst>
               <p:ext uri="{D42A27DB-BD31-4B8C-83A1-F6EECF244321}">
-                <p14:modId xmlns:p14="http://schemas.microsoft.com/office/powerpoint/2010/main" val="620990592"/>
+                <p14:modId xmlns:p14="http://schemas.microsoft.com/office/powerpoint/2010/main" val="3019922543"/>
               </p:ext>
             </p:extLst>
           </p:nvPr>
@@ -18949,7 +19089,7 @@
                           <a:effectLst/>
                           <a:latin typeface="Aptos Narrow" panose="020B0004020202020204" pitchFamily="34" charset="0"/>
                         </a:rPr>
-                        <a:t>STS</a:t>
+                        <a:t>STS (td-varying)</a:t>
                       </a:r>
                     </a:p>
                   </a:txBody>
@@ -20828,6 +20968,35 @@
       </p:sp>
       <p:sp>
         <p:nvSpPr>
+          <p:cNvPr id="6" name="Espace réservé du numéro de diapositive 5">
+            <a:extLst>
+              <a:ext uri="{FF2B5EF4-FFF2-40B4-BE49-F238E27FC236}">
+                <a16:creationId xmlns:a16="http://schemas.microsoft.com/office/drawing/2014/main" id="{82C1B982-4F1C-E374-A918-517772D7E382}"/>
+              </a:ext>
+            </a:extLst>
+          </p:cNvPr>
+          <p:cNvSpPr>
+            <a:spLocks noGrp="1"/>
+          </p:cNvSpPr>
+          <p:nvPr>
+            <p:ph type="sldNum" idx="12"/>
+          </p:nvPr>
+        </p:nvSpPr>
+        <p:spPr/>
+        <p:txBody>
+          <a:bodyPr/>
+          <a:lstStyle/>
+          <a:p>
+            <a:fld id="{1E1EA8E3-33CC-465E-BBDB-C5F5B41B1D80}" type="slidenum">
+              <a:rPr lang="en-GB" smtClean="0"/>
+              <a:t>14</a:t>
+            </a:fld>
+            <a:endParaRPr lang="en-GB"/>
+          </a:p>
+        </p:txBody>
+      </p:sp>
+      <p:sp>
+        <p:nvSpPr>
           <p:cNvPr id="3" name="Espace réservé du contenu 2">
             <a:extLst>
               <a:ext uri="{FF2B5EF4-FFF2-40B4-BE49-F238E27FC236}">
@@ -20839,15 +21008,10 @@
             <a:spLocks noGrp="1"/>
           </p:cNvSpPr>
           <p:nvPr>
-            <p:ph idx="1"/>
+            <p:ph sz="half" idx="2"/>
           </p:nvPr>
         </p:nvSpPr>
-        <p:spPr>
-          <a:xfrm>
-            <a:off x="838200" y="1811481"/>
-            <a:ext cx="10515600" cy="3881904"/>
-          </a:xfrm>
-        </p:spPr>
+        <p:spPr/>
         <p:txBody>
           <a:bodyPr/>
           <a:lstStyle/>
@@ -20872,10 +21036,15 @@
             <a:spLocks noGrp="1"/>
           </p:cNvSpPr>
           <p:nvPr>
-            <p:ph type="ftr" sz="quarter" idx="11"/>
+            <p:ph type="ftr" sz="quarter" idx="4294967295"/>
           </p:nvPr>
         </p:nvSpPr>
-        <p:spPr/>
+        <p:spPr>
+          <a:xfrm>
+            <a:off x="0" y="0"/>
+            <a:ext cx="0" cy="0"/>
+          </a:xfrm>
+        </p:spPr>
         <p:txBody>
           <a:bodyPr/>
           <a:lstStyle/>
@@ -20902,7 +21071,7 @@
           <p:nvPr>
             <p:extLst>
               <p:ext uri="{D42A27DB-BD31-4B8C-83A1-F6EECF244321}">
-                <p14:modId xmlns:p14="http://schemas.microsoft.com/office/powerpoint/2010/main" val="2206157639"/>
+                <p14:modId xmlns:p14="http://schemas.microsoft.com/office/powerpoint/2010/main" val="1911955890"/>
               </p:ext>
             </p:extLst>
           </p:nvPr>
@@ -22855,7 +23024,7 @@
                           <a:effectLst/>
                           <a:latin typeface="Aptos Narrow" panose="020B0004020202020204" pitchFamily="34" charset="0"/>
                         </a:rPr>
-                        <a:t>STS</a:t>
+                        <a:t>STS (td-varying)</a:t>
                       </a:r>
                     </a:p>
                   </a:txBody>
@@ -24734,6 +24903,35 @@
       </p:sp>
       <p:sp>
         <p:nvSpPr>
+          <p:cNvPr id="5" name="Espace réservé du numéro de diapositive 4">
+            <a:extLst>
+              <a:ext uri="{FF2B5EF4-FFF2-40B4-BE49-F238E27FC236}">
+                <a16:creationId xmlns:a16="http://schemas.microsoft.com/office/drawing/2014/main" id="{B582F1C4-AE5D-4E93-E897-5847503A84FF}"/>
+              </a:ext>
+            </a:extLst>
+          </p:cNvPr>
+          <p:cNvSpPr>
+            <a:spLocks noGrp="1"/>
+          </p:cNvSpPr>
+          <p:nvPr>
+            <p:ph type="sldNum" idx="12"/>
+          </p:nvPr>
+        </p:nvSpPr>
+        <p:spPr/>
+        <p:txBody>
+          <a:bodyPr/>
+          <a:lstStyle/>
+          <a:p>
+            <a:fld id="{1E1EA8E3-33CC-465E-BBDB-C5F5B41B1D80}" type="slidenum">
+              <a:rPr lang="en-GB" smtClean="0"/>
+              <a:t>15</a:t>
+            </a:fld>
+            <a:endParaRPr lang="en-GB"/>
+          </a:p>
+        </p:txBody>
+      </p:sp>
+      <p:sp>
+        <p:nvSpPr>
           <p:cNvPr id="3" name="Espace réservé du contenu 2">
             <a:extLst>
               <a:ext uri="{FF2B5EF4-FFF2-40B4-BE49-F238E27FC236}">
@@ -24745,15 +24943,10 @@
             <a:spLocks noGrp="1"/>
           </p:cNvSpPr>
           <p:nvPr>
-            <p:ph idx="1"/>
+            <p:ph sz="half" idx="2"/>
           </p:nvPr>
         </p:nvSpPr>
-        <p:spPr>
-          <a:xfrm>
-            <a:off x="838200" y="1811481"/>
-            <a:ext cx="10515600" cy="3881904"/>
-          </a:xfrm>
-        </p:spPr>
+        <p:spPr/>
         <p:txBody>
           <a:bodyPr/>
           <a:lstStyle/>
@@ -24778,10 +24971,15 @@
             <a:spLocks noGrp="1"/>
           </p:cNvSpPr>
           <p:nvPr>
-            <p:ph type="ftr" sz="quarter" idx="11"/>
+            <p:ph type="ftr" sz="quarter" idx="4294967295"/>
           </p:nvPr>
         </p:nvSpPr>
-        <p:spPr/>
+        <p:spPr>
+          <a:xfrm>
+            <a:off x="0" y="0"/>
+            <a:ext cx="0" cy="0"/>
+          </a:xfrm>
+        </p:spPr>
         <p:txBody>
           <a:bodyPr/>
           <a:lstStyle/>
@@ -24808,7 +25006,7 @@
           <p:nvPr>
             <p:extLst>
               <p:ext uri="{D42A27DB-BD31-4B8C-83A1-F6EECF244321}">
-                <p14:modId xmlns:p14="http://schemas.microsoft.com/office/powerpoint/2010/main" val="67047116"/>
+                <p14:modId xmlns:p14="http://schemas.microsoft.com/office/powerpoint/2010/main" val="1526414506"/>
               </p:ext>
             </p:extLst>
           </p:nvPr>
@@ -26761,7 +26959,7 @@
                           <a:effectLst/>
                           <a:latin typeface="Aptos Narrow" panose="020B0004020202020204" pitchFamily="34" charset="0"/>
                         </a:rPr>
-                        <a:t>STS</a:t>
+                        <a:t>STS (td-varying)</a:t>
                       </a:r>
                     </a:p>
                   </a:txBody>
@@ -28640,6 +28838,40 @@
       </p:sp>
       <p:sp>
         <p:nvSpPr>
+          <p:cNvPr id="5" name="Espace réservé du numéro de diapositive 4">
+            <a:extLst>
+              <a:ext uri="{FF2B5EF4-FFF2-40B4-BE49-F238E27FC236}">
+                <a16:creationId xmlns:a16="http://schemas.microsoft.com/office/drawing/2014/main" id="{BBFE2F80-E0F9-2CB7-7148-B311018189DD}"/>
+              </a:ext>
+            </a:extLst>
+          </p:cNvPr>
+          <p:cNvSpPr>
+            <a:spLocks noGrp="1"/>
+          </p:cNvSpPr>
+          <p:nvPr>
+            <p:ph type="sldNum" idx="12"/>
+          </p:nvPr>
+        </p:nvSpPr>
+        <p:spPr>
+          <a:xfrm>
+            <a:off x="4617190" y="5949791"/>
+            <a:ext cx="2743200" cy="365125"/>
+          </a:xfrm>
+        </p:spPr>
+        <p:txBody>
+          <a:bodyPr/>
+          <a:lstStyle/>
+          <a:p>
+            <a:fld id="{1E1EA8E3-33CC-465E-BBDB-C5F5B41B1D80}" type="slidenum">
+              <a:rPr lang="en-GB" smtClean="0"/>
+              <a:t>16</a:t>
+            </a:fld>
+            <a:endParaRPr lang="en-GB"/>
+          </a:p>
+        </p:txBody>
+      </p:sp>
+      <p:sp>
+        <p:nvSpPr>
           <p:cNvPr id="3" name="Espace réservé du contenu 2">
             <a:extLst>
               <a:ext uri="{FF2B5EF4-FFF2-40B4-BE49-F238E27FC236}">
@@ -28651,15 +28883,10 @@
             <a:spLocks noGrp="1"/>
           </p:cNvSpPr>
           <p:nvPr>
-            <p:ph idx="1"/>
+            <p:ph sz="half" idx="2"/>
           </p:nvPr>
         </p:nvSpPr>
-        <p:spPr>
-          <a:xfrm>
-            <a:off x="838200" y="1811481"/>
-            <a:ext cx="10515600" cy="3881904"/>
-          </a:xfrm>
-        </p:spPr>
+        <p:spPr/>
         <p:txBody>
           <a:bodyPr/>
           <a:lstStyle/>
@@ -28684,10 +28911,15 @@
             <a:spLocks noGrp="1"/>
           </p:cNvSpPr>
           <p:nvPr>
-            <p:ph type="ftr" sz="quarter" idx="11"/>
+            <p:ph type="ftr" sz="quarter" idx="4294967295"/>
           </p:nvPr>
         </p:nvSpPr>
-        <p:spPr/>
+        <p:spPr>
+          <a:xfrm>
+            <a:off x="0" y="0"/>
+            <a:ext cx="0" cy="0"/>
+          </a:xfrm>
+        </p:spPr>
         <p:txBody>
           <a:bodyPr/>
           <a:lstStyle/>
@@ -28714,13 +28946,13 @@
           <p:nvPr>
             <p:extLst>
               <p:ext uri="{D42A27DB-BD31-4B8C-83A1-F6EECF244321}">
-                <p14:modId xmlns:p14="http://schemas.microsoft.com/office/powerpoint/2010/main" val="4115727422"/>
+                <p14:modId xmlns:p14="http://schemas.microsoft.com/office/powerpoint/2010/main" val="2769595543"/>
               </p:ext>
             </p:extLst>
           </p:nvPr>
         </p:nvGraphicFramePr>
         <p:xfrm>
-          <a:off x="838199" y="2349795"/>
+          <a:off x="730989" y="1862255"/>
           <a:ext cx="10730022" cy="4098552"/>
         </p:xfrm>
         <a:graphic>
@@ -28861,7 +29093,7 @@
         </p:blipFill>
         <p:spPr>
           <a:xfrm>
-            <a:off x="916504" y="3037876"/>
+            <a:off x="809294" y="2550336"/>
             <a:ext cx="3410947" cy="3193823"/>
           </a:xfrm>
           <a:prstGeom prst="rect">
@@ -28891,7 +29123,7 @@
         </p:blipFill>
         <p:spPr>
           <a:xfrm>
-            <a:off x="4511417" y="3048509"/>
+            <a:off x="4404207" y="2560969"/>
             <a:ext cx="3410947" cy="3180760"/>
           </a:xfrm>
           <a:prstGeom prst="rect">
@@ -28921,7 +29153,7 @@
         </p:blipFill>
         <p:spPr>
           <a:xfrm>
-            <a:off x="8046077" y="3048508"/>
+            <a:off x="7938867" y="2560968"/>
             <a:ext cx="3459789" cy="3226307"/>
           </a:xfrm>
           <a:prstGeom prst="rect">
@@ -28989,6 +29221,35 @@
       </p:sp>
       <p:sp>
         <p:nvSpPr>
+          <p:cNvPr id="4" name="Espace réservé du numéro de diapositive 3">
+            <a:extLst>
+              <a:ext uri="{FF2B5EF4-FFF2-40B4-BE49-F238E27FC236}">
+                <a16:creationId xmlns:a16="http://schemas.microsoft.com/office/drawing/2014/main" id="{4F3FF027-F030-A44A-DFB1-EAC01371A65A}"/>
+              </a:ext>
+            </a:extLst>
+          </p:cNvPr>
+          <p:cNvSpPr>
+            <a:spLocks noGrp="1"/>
+          </p:cNvSpPr>
+          <p:nvPr>
+            <p:ph type="sldNum" idx="12"/>
+          </p:nvPr>
+        </p:nvSpPr>
+        <p:spPr/>
+        <p:txBody>
+          <a:bodyPr/>
+          <a:lstStyle/>
+          <a:p>
+            <a:fld id="{1E1EA8E3-33CC-465E-BBDB-C5F5B41B1D80}" type="slidenum">
+              <a:rPr lang="en-GB" smtClean="0"/>
+              <a:t>17</a:t>
+            </a:fld>
+            <a:endParaRPr lang="en-GB"/>
+          </a:p>
+        </p:txBody>
+      </p:sp>
+      <p:sp>
+        <p:nvSpPr>
           <p:cNvPr id="3" name="Content Placeholder 2">
             <a:extLst>
               <a:ext uri="{FF2B5EF4-FFF2-40B4-BE49-F238E27FC236}">
@@ -29000,7 +29261,7 @@
             <a:spLocks noGrp="1"/>
           </p:cNvSpPr>
           <p:nvPr>
-            <p:ph idx="1"/>
+            <p:ph sz="half" idx="2"/>
           </p:nvPr>
         </p:nvSpPr>
         <p:spPr/>
@@ -29009,53 +29270,53 @@
           <a:lstStyle/>
           <a:p>
             <a:r>
-              <a:rPr lang="en-GB" noProof="0" dirty="0"/>
+              <a:rPr lang="en-GB" sz="2400" noProof="0" dirty="0"/>
               <a:t>Need to understand the principles of the main algorithms (not all the technical details)</a:t>
             </a:r>
           </a:p>
           <a:p>
             <a:pPr lvl="1"/>
             <a:r>
-              <a:rPr lang="en-GB" noProof="0" dirty="0"/>
+              <a:rPr lang="en-GB" sz="2000" noProof="0" dirty="0"/>
               <a:t>Software automates many details</a:t>
             </a:r>
           </a:p>
           <a:p>
             <a:r>
-              <a:rPr lang="en-GB" noProof="0" dirty="0"/>
+              <a:rPr lang="en-GB" sz="2400" noProof="0" dirty="0"/>
               <a:t>Need for good quality reports</a:t>
             </a:r>
           </a:p>
           <a:p>
             <a:pPr lvl="1"/>
             <a:r>
-              <a:rPr lang="en-GB" noProof="0" dirty="0"/>
+              <a:rPr lang="en-GB" sz="2000" noProof="0" dirty="0"/>
               <a:t>Recall: </a:t>
             </a:r>
             <a:r>
-              <a:rPr lang="en-GB" i="1" noProof="0" dirty="0"/>
+              <a:rPr lang="en-GB" sz="2000" i="1" noProof="0" dirty="0"/>
               <a:t>“</a:t>
             </a:r>
             <a:r>
-              <a:rPr lang="en-GB" sz="2400" i="1" noProof="0" dirty="0"/>
+              <a:rPr lang="en-GB" sz="2800" i="1" noProof="0" dirty="0"/>
               <a:t>seasonally adjusted series should have neither residual seasonality nor residual calendar effects” +  should respect the hypotheses on the components</a:t>
             </a:r>
-            <a:endParaRPr lang="en-GB" i="1" noProof="0" dirty="0"/>
+            <a:endParaRPr lang="en-GB" sz="2000" i="1" noProof="0" dirty="0"/>
           </a:p>
           <a:p>
             <a:r>
-              <a:rPr lang="en-GB" noProof="0" dirty="0"/>
+              <a:rPr lang="en-GB" sz="2400" noProof="0" dirty="0"/>
               <a:t>Need to “industrialize” the seasonal adjustment processing</a:t>
             </a:r>
           </a:p>
           <a:p>
             <a:pPr lvl="1"/>
             <a:r>
-              <a:rPr lang="en-GB" noProof="0" dirty="0"/>
+              <a:rPr lang="en-GB" sz="2000" noProof="0" dirty="0"/>
               <a:t>Additional request: </a:t>
             </a:r>
             <a:r>
-              <a:rPr lang="en-GB" i="1" noProof="0" dirty="0"/>
+              <a:rPr lang="en-GB" sz="2000" i="1" noProof="0" dirty="0"/>
               <a:t>“Seasonal adjustment procedures should generate consistent and robust results”</a:t>
             </a:r>
           </a:p>
@@ -29080,10 +29341,15 @@
             <a:spLocks noGrp="1"/>
           </p:cNvSpPr>
           <p:nvPr>
-            <p:ph type="ftr" sz="quarter" idx="11"/>
+            <p:ph type="ftr" sz="quarter" idx="4294967295"/>
           </p:nvPr>
         </p:nvSpPr>
-        <p:spPr/>
+        <p:spPr>
+          <a:xfrm>
+            <a:off x="0" y="0"/>
+            <a:ext cx="0" cy="0"/>
+          </a:xfrm>
+        </p:spPr>
         <p:txBody>
           <a:bodyPr/>
           <a:lstStyle/>
@@ -29175,6 +29441,36 @@
           </a:p>
         </p:txBody>
       </p:sp>
+      <p:sp>
+        <p:nvSpPr>
+          <p:cNvPr id="4" name="Espace réservé du numéro de diapositive 3">
+            <a:extLst>
+              <a:ext uri="{FF2B5EF4-FFF2-40B4-BE49-F238E27FC236}">
+                <a16:creationId xmlns:a16="http://schemas.microsoft.com/office/drawing/2014/main" id="{5B627E33-3EE2-3D50-3D36-5630AEFA6A74}"/>
+              </a:ext>
+            </a:extLst>
+          </p:cNvPr>
+          <p:cNvSpPr>
+            <a:spLocks noGrp="1"/>
+          </p:cNvSpPr>
+          <p:nvPr>
+            <p:ph type="sldNum" idx="12"/>
+          </p:nvPr>
+        </p:nvSpPr>
+        <p:spPr/>
+        <p:txBody>
+          <a:bodyPr/>
+          <a:lstStyle/>
+          <a:p>
+            <a:fld id="{00000000-1234-1234-1234-123412341234}" type="slidenum">
+              <a:rPr lang="en-GB" smtClean="0"/>
+              <a:pPr/>
+              <a:t>18</a:t>
+            </a:fld>
+            <a:endParaRPr lang="en-GB"/>
+          </a:p>
+        </p:txBody>
+      </p:sp>
     </p:spTree>
     <p:extLst>
       <p:ext uri="{BB962C8B-B14F-4D97-AF65-F5344CB8AC3E}">
@@ -29235,6 +29531,35 @@
       </p:sp>
       <p:sp>
         <p:nvSpPr>
+          <p:cNvPr id="4" name="Espace réservé du numéro de diapositive 3">
+            <a:extLst>
+              <a:ext uri="{FF2B5EF4-FFF2-40B4-BE49-F238E27FC236}">
+                <a16:creationId xmlns:a16="http://schemas.microsoft.com/office/drawing/2014/main" id="{2C152665-48B9-5531-81E8-4121CA630CB6}"/>
+              </a:ext>
+            </a:extLst>
+          </p:cNvPr>
+          <p:cNvSpPr>
+            <a:spLocks noGrp="1"/>
+          </p:cNvSpPr>
+          <p:nvPr>
+            <p:ph type="sldNum" idx="12"/>
+          </p:nvPr>
+        </p:nvSpPr>
+        <p:spPr/>
+        <p:txBody>
+          <a:bodyPr/>
+          <a:lstStyle/>
+          <a:p>
+            <a:fld id="{1E1EA8E3-33CC-465E-BBDB-C5F5B41B1D80}" type="slidenum">
+              <a:rPr lang="en-GB" smtClean="0"/>
+              <a:t>2</a:t>
+            </a:fld>
+            <a:endParaRPr lang="en-GB"/>
+          </a:p>
+        </p:txBody>
+      </p:sp>
+      <p:sp>
+        <p:nvSpPr>
           <p:cNvPr id="3" name="Content Placeholder 2">
             <a:extLst>
               <a:ext uri="{FF2B5EF4-FFF2-40B4-BE49-F238E27FC236}">
@@ -29246,7 +29571,7 @@
             <a:spLocks noGrp="1"/>
           </p:cNvSpPr>
           <p:nvPr>
-            <p:ph idx="1"/>
+            <p:ph sz="half" idx="2"/>
           </p:nvPr>
         </p:nvSpPr>
         <p:spPr/>
@@ -29315,10 +29640,15 @@
             <a:spLocks noGrp="1"/>
           </p:cNvSpPr>
           <p:nvPr>
-            <p:ph type="ftr" sz="quarter" idx="11"/>
+            <p:ph type="ftr" sz="quarter" idx="4294967295"/>
           </p:nvPr>
         </p:nvSpPr>
-        <p:spPr/>
+        <p:spPr>
+          <a:xfrm>
+            <a:off x="0" y="0"/>
+            <a:ext cx="0" cy="0"/>
+          </a:xfrm>
+        </p:spPr>
         <p:txBody>
           <a:bodyPr/>
           <a:lstStyle/>
@@ -29390,6 +29720,35 @@
       </p:sp>
       <p:sp>
         <p:nvSpPr>
+          <p:cNvPr id="5" name="Espace réservé du numéro de diapositive 4">
+            <a:extLst>
+              <a:ext uri="{FF2B5EF4-FFF2-40B4-BE49-F238E27FC236}">
+                <a16:creationId xmlns:a16="http://schemas.microsoft.com/office/drawing/2014/main" id="{CD48CA0D-EF4C-7255-82DC-266EC411CC5B}"/>
+              </a:ext>
+            </a:extLst>
+          </p:cNvPr>
+          <p:cNvSpPr>
+            <a:spLocks noGrp="1"/>
+          </p:cNvSpPr>
+          <p:nvPr>
+            <p:ph type="sldNum" idx="12"/>
+          </p:nvPr>
+        </p:nvSpPr>
+        <p:spPr/>
+        <p:txBody>
+          <a:bodyPr/>
+          <a:lstStyle/>
+          <a:p>
+            <a:fld id="{1E1EA8E3-33CC-465E-BBDB-C5F5B41B1D80}" type="slidenum">
+              <a:rPr lang="en-GB" smtClean="0"/>
+              <a:t>3</a:t>
+            </a:fld>
+            <a:endParaRPr lang="en-GB"/>
+          </a:p>
+        </p:txBody>
+      </p:sp>
+      <p:sp>
+        <p:nvSpPr>
           <p:cNvPr id="3" name="Content Placeholder 2">
             <a:extLst>
               <a:ext uri="{FF2B5EF4-FFF2-40B4-BE49-F238E27FC236}">
@@ -29401,7 +29760,7 @@
             <a:spLocks noGrp="1"/>
           </p:cNvSpPr>
           <p:nvPr>
-            <p:ph idx="1"/>
+            <p:ph sz="half" idx="2"/>
           </p:nvPr>
         </p:nvSpPr>
         <p:spPr/>
@@ -29421,6 +29780,39 @@
       </p:sp>
       <p:sp>
         <p:nvSpPr>
+          <p:cNvPr id="6" name="Footer Placeholder 5">
+            <a:extLst>
+              <a:ext uri="{FF2B5EF4-FFF2-40B4-BE49-F238E27FC236}">
+                <a16:creationId xmlns:a16="http://schemas.microsoft.com/office/drawing/2014/main" id="{D6ECB398-D35C-41B9-A4B3-1E1FFCE50321}"/>
+              </a:ext>
+            </a:extLst>
+          </p:cNvPr>
+          <p:cNvSpPr>
+            <a:spLocks noGrp="1"/>
+          </p:cNvSpPr>
+          <p:nvPr>
+            <p:ph type="ftr" sz="quarter" idx="4294967295"/>
+          </p:nvPr>
+        </p:nvSpPr>
+        <p:spPr>
+          <a:xfrm>
+            <a:off x="0" y="0"/>
+            <a:ext cx="0" cy="0"/>
+          </a:xfrm>
+        </p:spPr>
+        <p:txBody>
+          <a:bodyPr/>
+          <a:lstStyle/>
+          <a:p>
+            <a:r>
+              <a:rPr lang="en-GB" noProof="0" dirty="0"/>
+              <a:t>ESTP Training. Seasonal adjustment</a:t>
+            </a:r>
+          </a:p>
+        </p:txBody>
+      </p:sp>
+      <p:sp>
+        <p:nvSpPr>
           <p:cNvPr id="4" name="TextBox 3">
             <a:extLst>
               <a:ext uri="{FF2B5EF4-FFF2-40B4-BE49-F238E27FC236}">
@@ -29433,8 +29825,8 @@
         </p:nvSpPr>
         <p:spPr>
           <a:xfrm>
-            <a:off x="1171112" y="2450237"/>
-            <a:ext cx="10182688" cy="3170099"/>
+            <a:off x="1213642" y="1941143"/>
+            <a:ext cx="10182688" cy="4154984"/>
           </a:xfrm>
           <a:prstGeom prst="rect">
             <a:avLst/>
@@ -29453,7 +29845,7 @@
           <a:lstStyle/>
           <a:p>
             <a:r>
-              <a:rPr lang="en-GB" sz="1800" b="0" i="0" u="none" strike="noStrike" baseline="0" noProof="0" dirty="0">
+              <a:rPr lang="en-GB" sz="2000" b="0" i="0" u="none" strike="noStrike" baseline="0" noProof="0" dirty="0">
                 <a:solidFill>
                   <a:srgbClr val="000000"/>
                 </a:solidFill>
@@ -29463,7 +29855,7 @@
             </a:r>
           </a:p>
           <a:p>
-            <a:endParaRPr lang="en-GB" sz="1800" b="0" i="0" u="none" strike="noStrike" baseline="0" noProof="0" dirty="0">
+            <a:endParaRPr lang="en-GB" sz="2000" b="0" i="0" u="none" strike="noStrike" baseline="0" noProof="0" dirty="0">
               <a:solidFill>
                 <a:srgbClr val="000000"/>
               </a:solidFill>
@@ -29472,7 +29864,7 @@
           </a:p>
           <a:p>
             <a:r>
-              <a:rPr lang="en-GB" sz="1800" b="0" i="0" u="none" strike="noStrike" baseline="0" noProof="0" dirty="0">
+              <a:rPr lang="en-GB" sz="2000" b="0" i="0" u="none" strike="noStrike" baseline="0" noProof="0" dirty="0">
                 <a:solidFill>
                   <a:srgbClr val="000000"/>
                 </a:solidFill>
@@ -29482,7 +29874,7 @@
             </a:r>
           </a:p>
           <a:p>
-            <a:endParaRPr lang="en-GB" sz="1800" b="0" i="0" u="none" strike="noStrike" baseline="0" noProof="0" dirty="0">
+            <a:endParaRPr lang="en-GB" sz="2000" b="0" i="0" u="none" strike="noStrike" baseline="0" noProof="0" dirty="0">
               <a:solidFill>
                 <a:srgbClr val="000000"/>
               </a:solidFill>
@@ -29491,7 +29883,7 @@
           </a:p>
           <a:p>
             <a:r>
-              <a:rPr lang="en-GB" sz="1800" b="0" i="0" u="none" strike="noStrike" baseline="0" noProof="0" dirty="0">
+              <a:rPr lang="en-GB" sz="2000" b="0" i="0" u="none" strike="noStrike" baseline="0" noProof="0" dirty="0">
                 <a:solidFill>
                   <a:srgbClr val="000000"/>
                 </a:solidFill>
@@ -29500,41 +29892,13 @@
               <a:t>Usual seasonal fluctuations mean those movements which recur with similar intensity in the same season each year and which, based on the past movements of the time series in question and under normal circumstances, can be expected to recur. Calendar effects arise from annual differences in the number of working or trading days in a month or a quarter, or the dates or days of public holidays</a:t>
             </a:r>
             <a:r>
-              <a:rPr lang="en-GB" sz="2000" b="0" i="0" u="none" strike="noStrike" baseline="0" noProof="0" dirty="0">
+              <a:rPr lang="en-GB" sz="2400" b="0" i="0" u="none" strike="noStrike" baseline="0" noProof="0" dirty="0">
                 <a:solidFill>
                   <a:srgbClr val="000000"/>
                 </a:solidFill>
                 <a:latin typeface="Myriad Pro Light SemiCond"/>
               </a:rPr>
               <a:t>. </a:t>
-            </a:r>
-          </a:p>
-        </p:txBody>
-      </p:sp>
-      <p:sp>
-        <p:nvSpPr>
-          <p:cNvPr id="6" name="Footer Placeholder 5">
-            <a:extLst>
-              <a:ext uri="{FF2B5EF4-FFF2-40B4-BE49-F238E27FC236}">
-                <a16:creationId xmlns:a16="http://schemas.microsoft.com/office/drawing/2014/main" id="{D6ECB398-D35C-41B9-A4B3-1E1FFCE50321}"/>
-              </a:ext>
-            </a:extLst>
-          </p:cNvPr>
-          <p:cNvSpPr>
-            <a:spLocks noGrp="1"/>
-          </p:cNvSpPr>
-          <p:nvPr>
-            <p:ph type="ftr" sz="quarter" idx="11"/>
-          </p:nvPr>
-        </p:nvSpPr>
-        <p:spPr/>
-        <p:txBody>
-          <a:bodyPr/>
-          <a:lstStyle/>
-          <a:p>
-            <a:r>
-              <a:rPr lang="en-GB" noProof="0" dirty="0"/>
-              <a:t>ESTP Training. Seasonal adjustment</a:t>
             </a:r>
           </a:p>
         </p:txBody>
@@ -29709,6 +30073,35 @@
       </p:sp>
       <p:sp>
         <p:nvSpPr>
+          <p:cNvPr id="2" name="Espace réservé du numéro de diapositive 1">
+            <a:extLst>
+              <a:ext uri="{FF2B5EF4-FFF2-40B4-BE49-F238E27FC236}">
+                <a16:creationId xmlns:a16="http://schemas.microsoft.com/office/drawing/2014/main" id="{A050BB1D-2FE8-EB30-DE58-81435AAF68BB}"/>
+              </a:ext>
+            </a:extLst>
+          </p:cNvPr>
+          <p:cNvSpPr>
+            <a:spLocks noGrp="1"/>
+          </p:cNvSpPr>
+          <p:nvPr>
+            <p:ph type="sldNum" idx="12"/>
+          </p:nvPr>
+        </p:nvSpPr>
+        <p:spPr/>
+        <p:txBody>
+          <a:bodyPr/>
+          <a:lstStyle/>
+          <a:p>
+            <a:fld id="{1E1EA8E3-33CC-465E-BBDB-C5F5B41B1D80}" type="slidenum">
+              <a:rPr lang="en-GB" smtClean="0"/>
+              <a:t>4</a:t>
+            </a:fld>
+            <a:endParaRPr lang="en-GB"/>
+          </a:p>
+        </p:txBody>
+      </p:sp>
+      <p:sp>
+        <p:nvSpPr>
           <p:cNvPr id="6" name="Footer Placeholder 5">
             <a:extLst>
               <a:ext uri="{FF2B5EF4-FFF2-40B4-BE49-F238E27FC236}">
@@ -29720,10 +30113,15 @@
             <a:spLocks noGrp="1"/>
           </p:cNvSpPr>
           <p:nvPr>
-            <p:ph type="ftr" sz="quarter" idx="11"/>
+            <p:ph type="ftr" sz="quarter" idx="4294967295"/>
           </p:nvPr>
         </p:nvSpPr>
-        <p:spPr/>
+        <p:spPr>
+          <a:xfrm>
+            <a:off x="0" y="0"/>
+            <a:ext cx="0" cy="0"/>
+          </a:xfrm>
+        </p:spPr>
         <p:txBody>
           <a:bodyPr/>
           <a:lstStyle/>
@@ -29793,8 +30191,70 @@
           </a:p>
         </p:txBody>
       </p:sp>
-      <mc:AlternateContent xmlns:mc="http://schemas.openxmlformats.org/markup-compatibility/2006">
-        <mc:Choice xmlns:a14="http://schemas.microsoft.com/office/drawing/2010/main" Requires="a14">
+      <p:sp>
+        <p:nvSpPr>
+          <p:cNvPr id="3" name="Espace réservé du numéro de diapositive 2">
+            <a:extLst>
+              <a:ext uri="{FF2B5EF4-FFF2-40B4-BE49-F238E27FC236}">
+                <a16:creationId xmlns:a16="http://schemas.microsoft.com/office/drawing/2014/main" id="{63572E7F-3946-733E-AE7B-F0DA4E06F2F8}"/>
+              </a:ext>
+            </a:extLst>
+          </p:cNvPr>
+          <p:cNvSpPr>
+            <a:spLocks noGrp="1"/>
+          </p:cNvSpPr>
+          <p:nvPr>
+            <p:ph type="sldNum" idx="12"/>
+          </p:nvPr>
+        </p:nvSpPr>
+        <p:spPr/>
+        <p:txBody>
+          <a:bodyPr/>
+          <a:lstStyle/>
+          <a:p>
+            <a:fld id="{1E1EA8E3-33CC-465E-BBDB-C5F5B41B1D80}" type="slidenum">
+              <a:rPr lang="en-GB" smtClean="0"/>
+              <a:t>5</a:t>
+            </a:fld>
+            <a:endParaRPr lang="en-GB"/>
+          </a:p>
+        </p:txBody>
+      </p:sp>
+      <p:sp>
+        <p:nvSpPr>
+          <p:cNvPr id="33" name="Footer Placeholder 32">
+            <a:extLst>
+              <a:ext uri="{FF2B5EF4-FFF2-40B4-BE49-F238E27FC236}">
+                <a16:creationId xmlns:a16="http://schemas.microsoft.com/office/drawing/2014/main" id="{5C39D6B6-21E0-4CAC-92A2-4044C078D876}"/>
+              </a:ext>
+            </a:extLst>
+          </p:cNvPr>
+          <p:cNvSpPr>
+            <a:spLocks noGrp="1"/>
+          </p:cNvSpPr>
+          <p:nvPr>
+            <p:ph type="ftr" sz="quarter" idx="4294967295"/>
+          </p:nvPr>
+        </p:nvSpPr>
+        <p:spPr>
+          <a:xfrm>
+            <a:off x="0" y="0"/>
+            <a:ext cx="0" cy="0"/>
+          </a:xfrm>
+        </p:spPr>
+        <p:txBody>
+          <a:bodyPr/>
+          <a:lstStyle/>
+          <a:p>
+            <a:r>
+              <a:rPr lang="en-GB" noProof="0" dirty="0"/>
+              <a:t>ESTP Training. Seasonal adjustment</a:t>
+            </a:r>
+          </a:p>
+        </p:txBody>
+      </p:sp>
+      <mc:AlternateContent xmlns:mc="http://schemas.openxmlformats.org/markup-compatibility/2006" xmlns:a14="http://schemas.microsoft.com/office/drawing/2010/main">
+        <mc:Choice Requires="a14">
           <p:sp>
             <p:nvSpPr>
               <p:cNvPr id="4" name="Rectangle: Rounded Corners 3">
@@ -29878,7 +30338,7 @@
             </p:txBody>
           </p:sp>
         </mc:Choice>
-        <mc:Fallback>
+        <mc:Fallback xmlns="">
           <p:sp>
             <p:nvSpPr>
               <p:cNvPr id="4" name="Rectangle: Rounded Corners 3">
@@ -29923,8 +30383,8 @@
           </p:sp>
         </mc:Fallback>
       </mc:AlternateContent>
-      <mc:AlternateContent xmlns:mc="http://schemas.openxmlformats.org/markup-compatibility/2006">
-        <mc:Choice xmlns:a14="http://schemas.microsoft.com/office/drawing/2010/main" Requires="a14">
+      <mc:AlternateContent xmlns:mc="http://schemas.openxmlformats.org/markup-compatibility/2006" xmlns:a14="http://schemas.microsoft.com/office/drawing/2010/main">
+        <mc:Choice Requires="a14">
           <p:sp>
             <p:nvSpPr>
               <p:cNvPr id="5" name="Rectangle: Rounded Corners 4">
@@ -30008,7 +30468,7 @@
             </p:txBody>
           </p:sp>
         </mc:Choice>
-        <mc:Fallback>
+        <mc:Fallback xmlns="">
           <p:sp>
             <p:nvSpPr>
               <p:cNvPr id="5" name="Rectangle: Rounded Corners 4">
@@ -30053,8 +30513,8 @@
           </p:sp>
         </mc:Fallback>
       </mc:AlternateContent>
-      <mc:AlternateContent xmlns:mc="http://schemas.openxmlformats.org/markup-compatibility/2006">
-        <mc:Choice xmlns:a14="http://schemas.microsoft.com/office/drawing/2010/main" Requires="a14">
+      <mc:AlternateContent xmlns:mc="http://schemas.openxmlformats.org/markup-compatibility/2006" xmlns:a14="http://schemas.microsoft.com/office/drawing/2010/main">
+        <mc:Choice Requires="a14">
           <p:sp>
             <p:nvSpPr>
               <p:cNvPr id="6" name="Rectangle: Rounded Corners 5">
@@ -30138,7 +30598,7 @@
             </p:txBody>
           </p:sp>
         </mc:Choice>
-        <mc:Fallback>
+        <mc:Fallback xmlns="">
           <p:sp>
             <p:nvSpPr>
               <p:cNvPr id="6" name="Rectangle: Rounded Corners 5">
@@ -30183,8 +30643,8 @@
           </p:sp>
         </mc:Fallback>
       </mc:AlternateContent>
-      <mc:AlternateContent xmlns:mc="http://schemas.openxmlformats.org/markup-compatibility/2006">
-        <mc:Choice xmlns:a14="http://schemas.microsoft.com/office/drawing/2010/main" Requires="a14">
+      <mc:AlternateContent xmlns:mc="http://schemas.openxmlformats.org/markup-compatibility/2006" xmlns:a14="http://schemas.microsoft.com/office/drawing/2010/main">
+        <mc:Choice Requires="a14">
           <p:sp>
             <p:nvSpPr>
               <p:cNvPr id="7" name="Rectangle: Rounded Corners 6">
@@ -30268,7 +30728,7 @@
             </p:txBody>
           </p:sp>
         </mc:Choice>
-        <mc:Fallback>
+        <mc:Fallback xmlns="">
           <p:sp>
             <p:nvSpPr>
               <p:cNvPr id="7" name="Rectangle: Rounded Corners 6">
@@ -30442,8 +30902,8 @@
           </a:fontRef>
         </p:style>
       </p:cxnSp>
-      <mc:AlternateContent xmlns:mc="http://schemas.openxmlformats.org/markup-compatibility/2006">
-        <mc:Choice xmlns:a14="http://schemas.microsoft.com/office/drawing/2010/main" Requires="a14">
+      <mc:AlternateContent xmlns:mc="http://schemas.openxmlformats.org/markup-compatibility/2006" xmlns:a14="http://schemas.microsoft.com/office/drawing/2010/main">
+        <mc:Choice Requires="a14">
           <p:sp>
             <p:nvSpPr>
               <p:cNvPr id="18" name="TextBox 17">
@@ -30544,7 +31004,7 @@
             </p:txBody>
           </p:sp>
         </mc:Choice>
-        <mc:Fallback>
+        <mc:Fallback xmlns="">
           <p:sp>
             <p:nvSpPr>
               <p:cNvPr id="18" name="TextBox 17">
@@ -30589,8 +31049,8 @@
           </p:sp>
         </mc:Fallback>
       </mc:AlternateContent>
-      <mc:AlternateContent xmlns:mc="http://schemas.openxmlformats.org/markup-compatibility/2006">
-        <mc:Choice xmlns:a14="http://schemas.microsoft.com/office/drawing/2010/main" Requires="a14">
+      <mc:AlternateContent xmlns:mc="http://schemas.openxmlformats.org/markup-compatibility/2006" xmlns:a14="http://schemas.microsoft.com/office/drawing/2010/main">
+        <mc:Choice Requires="a14">
           <p:sp>
             <p:nvSpPr>
               <p:cNvPr id="25" name="Rectangle: Rounded Corners 24">
@@ -30709,7 +31169,7 @@
             </p:txBody>
           </p:sp>
         </mc:Choice>
-        <mc:Fallback>
+        <mc:Fallback xmlns="">
           <p:sp>
             <p:nvSpPr>
               <p:cNvPr id="25" name="Rectangle: Rounded Corners 24">
@@ -30755,8 +31215,8 @@
           </p:sp>
         </mc:Fallback>
       </mc:AlternateContent>
-      <mc:AlternateContent xmlns:mc="http://schemas.openxmlformats.org/markup-compatibility/2006">
-        <mc:Choice xmlns:a14="http://schemas.microsoft.com/office/drawing/2010/main" Requires="a14">
+      <mc:AlternateContent xmlns:mc="http://schemas.openxmlformats.org/markup-compatibility/2006" xmlns:a14="http://schemas.microsoft.com/office/drawing/2010/main">
+        <mc:Choice Requires="a14">
           <p:sp>
             <p:nvSpPr>
               <p:cNvPr id="26" name="Rectangle: Rounded Corners 25">
@@ -30846,7 +31306,7 @@
             </p:txBody>
           </p:sp>
         </mc:Choice>
-        <mc:Fallback>
+        <mc:Fallback xmlns="">
           <p:sp>
             <p:nvSpPr>
               <p:cNvPr id="26" name="Rectangle: Rounded Corners 25">
@@ -30937,8 +31397,8 @@
           </a:fontRef>
         </p:style>
       </p:cxnSp>
-      <mc:AlternateContent xmlns:mc="http://schemas.openxmlformats.org/markup-compatibility/2006">
-        <mc:Choice xmlns:a14="http://schemas.microsoft.com/office/drawing/2010/main" Requires="a14">
+      <mc:AlternateContent xmlns:mc="http://schemas.openxmlformats.org/markup-compatibility/2006" xmlns:a14="http://schemas.microsoft.com/office/drawing/2010/main">
+        <mc:Choice Requires="a14">
           <p:sp>
             <p:nvSpPr>
               <p:cNvPr id="31" name="TextBox 30">
@@ -31333,7 +31793,7 @@
             </p:txBody>
           </p:sp>
         </mc:Choice>
-        <mc:Fallback>
+        <mc:Fallback xmlns="">
           <p:sp>
             <p:nvSpPr>
               <p:cNvPr id="31" name="TextBox 30">
@@ -31378,36 +31838,8 @@
           </p:sp>
         </mc:Fallback>
       </mc:AlternateContent>
-      <p:sp>
-        <p:nvSpPr>
-          <p:cNvPr id="33" name="Footer Placeholder 32">
-            <a:extLst>
-              <a:ext uri="{FF2B5EF4-FFF2-40B4-BE49-F238E27FC236}">
-                <a16:creationId xmlns:a16="http://schemas.microsoft.com/office/drawing/2014/main" id="{5C39D6B6-21E0-4CAC-92A2-4044C078D876}"/>
-              </a:ext>
-            </a:extLst>
-          </p:cNvPr>
-          <p:cNvSpPr>
-            <a:spLocks noGrp="1"/>
-          </p:cNvSpPr>
-          <p:nvPr>
-            <p:ph type="ftr" sz="quarter" idx="11"/>
-          </p:nvPr>
-        </p:nvSpPr>
-        <p:spPr/>
-        <p:txBody>
-          <a:bodyPr/>
-          <a:lstStyle/>
-          <a:p>
-            <a:r>
-              <a:rPr lang="en-GB" noProof="0" dirty="0"/>
-              <a:t>ESTP Training. Seasonal adjustment</a:t>
-            </a:r>
-          </a:p>
-        </p:txBody>
-      </p:sp>
-      <mc:AlternateContent xmlns:mc="http://schemas.openxmlformats.org/markup-compatibility/2006">
-        <mc:Choice xmlns:a14="http://schemas.microsoft.com/office/drawing/2010/main" Requires="a14">
+      <mc:AlternateContent xmlns:mc="http://schemas.openxmlformats.org/markup-compatibility/2006" xmlns:a14="http://schemas.microsoft.com/office/drawing/2010/main">
+        <mc:Choice Requires="a14">
           <p:sp>
             <p:nvSpPr>
               <p:cNvPr id="30" name="TextBox 30">
@@ -31606,7 +32038,7 @@
             </p:txBody>
           </p:sp>
         </mc:Choice>
-        <mc:Fallback>
+        <mc:Fallback xmlns="">
           <p:sp>
             <p:nvSpPr>
               <p:cNvPr id="30" name="TextBox 30">
@@ -31711,6 +32143,35 @@
       </p:sp>
       <p:sp>
         <p:nvSpPr>
+          <p:cNvPr id="4" name="Espace réservé du numéro de diapositive 3">
+            <a:extLst>
+              <a:ext uri="{FF2B5EF4-FFF2-40B4-BE49-F238E27FC236}">
+                <a16:creationId xmlns:a16="http://schemas.microsoft.com/office/drawing/2014/main" id="{91C4CBE4-D51E-AD3F-CFE8-AA1590D4DE1D}"/>
+              </a:ext>
+            </a:extLst>
+          </p:cNvPr>
+          <p:cNvSpPr>
+            <a:spLocks noGrp="1"/>
+          </p:cNvSpPr>
+          <p:nvPr>
+            <p:ph type="sldNum" idx="12"/>
+          </p:nvPr>
+        </p:nvSpPr>
+        <p:spPr/>
+        <p:txBody>
+          <a:bodyPr/>
+          <a:lstStyle/>
+          <a:p>
+            <a:fld id="{1E1EA8E3-33CC-465E-BBDB-C5F5B41B1D80}" type="slidenum">
+              <a:rPr lang="en-GB" smtClean="0"/>
+              <a:t>6</a:t>
+            </a:fld>
+            <a:endParaRPr lang="en-GB"/>
+          </a:p>
+        </p:txBody>
+      </p:sp>
+      <p:sp>
+        <p:nvSpPr>
           <p:cNvPr id="3" name="Content Placeholder 2">
             <a:extLst>
               <a:ext uri="{FF2B5EF4-FFF2-40B4-BE49-F238E27FC236}">
@@ -31722,13 +32183,13 @@
             <a:spLocks noGrp="1"/>
           </p:cNvSpPr>
           <p:nvPr>
-            <p:ph idx="1"/>
+            <p:ph sz="half" idx="2"/>
           </p:nvPr>
         </p:nvSpPr>
         <p:spPr/>
         <p:txBody>
           <a:bodyPr>
-            <a:normAutofit fontScale="32500" lnSpcReduction="20000"/>
+            <a:normAutofit fontScale="40000" lnSpcReduction="20000"/>
           </a:bodyPr>
           <a:lstStyle/>
           <a:p>
@@ -31867,10 +32328,15 @@
             <a:spLocks noGrp="1"/>
           </p:cNvSpPr>
           <p:nvPr>
-            <p:ph type="ftr" sz="quarter" idx="11"/>
+            <p:ph type="ftr" sz="quarter" idx="4294967295"/>
           </p:nvPr>
         </p:nvSpPr>
-        <p:spPr/>
+        <p:spPr>
+          <a:xfrm>
+            <a:off x="0" y="0"/>
+            <a:ext cx="0" cy="0"/>
+          </a:xfrm>
+        </p:spPr>
         <p:txBody>
           <a:bodyPr/>
           <a:lstStyle/>
@@ -31946,8 +32412,37 @@
           </a:p>
         </p:txBody>
       </p:sp>
-      <mc:AlternateContent xmlns:mc="http://schemas.openxmlformats.org/markup-compatibility/2006">
-        <mc:Choice xmlns:a14="http://schemas.microsoft.com/office/drawing/2010/main" Requires="a14">
+      <p:sp>
+        <p:nvSpPr>
+          <p:cNvPr id="4" name="Espace réservé du numéro de diapositive 3">
+            <a:extLst>
+              <a:ext uri="{FF2B5EF4-FFF2-40B4-BE49-F238E27FC236}">
+                <a16:creationId xmlns:a16="http://schemas.microsoft.com/office/drawing/2014/main" id="{FCD14BBE-B79E-82A9-C8DD-90668A0546E9}"/>
+              </a:ext>
+            </a:extLst>
+          </p:cNvPr>
+          <p:cNvSpPr>
+            <a:spLocks noGrp="1"/>
+          </p:cNvSpPr>
+          <p:nvPr>
+            <p:ph type="sldNum" idx="12"/>
+          </p:nvPr>
+        </p:nvSpPr>
+        <p:spPr/>
+        <p:txBody>
+          <a:bodyPr/>
+          <a:lstStyle/>
+          <a:p>
+            <a:fld id="{1E1EA8E3-33CC-465E-BBDB-C5F5B41B1D80}" type="slidenum">
+              <a:rPr lang="en-GB" smtClean="0"/>
+              <a:t>7</a:t>
+            </a:fld>
+            <a:endParaRPr lang="en-GB"/>
+          </a:p>
+        </p:txBody>
+      </p:sp>
+      <mc:AlternateContent xmlns:mc="http://schemas.openxmlformats.org/markup-compatibility/2006" xmlns:a14="http://schemas.microsoft.com/office/drawing/2010/main">
+        <mc:Choice Requires="a14">
           <p:sp>
             <p:nvSpPr>
               <p:cNvPr id="3" name="Content Placeholder 2">
@@ -31961,7 +32456,7 @@
                 <a:spLocks noGrp="1"/>
               </p:cNvSpPr>
               <p:nvPr>
-                <p:ph idx="1"/>
+                <p:ph sz="half" idx="2"/>
               </p:nvPr>
             </p:nvSpPr>
             <p:spPr/>
@@ -31975,49 +32470,49 @@
                 <a14:m>
                   <m:oMath xmlns:m="http://schemas.openxmlformats.org/officeDocument/2006/math">
                     <m:r>
-                      <a:rPr lang="en-GB" b="0" i="1" noProof="0" smtClean="0">
+                      <a:rPr lang="en-GB" sz="2400" b="0" i="1" noProof="0" smtClean="0">
                         <a:latin typeface="Cambria Math" panose="02040503050406030204" pitchFamily="18" charset="0"/>
                         <a:cs typeface="Calibri" panose="020F0502020204030204" pitchFamily="34" charset="0"/>
                       </a:rPr>
                       <m:t>𝑌</m:t>
                     </m:r>
                     <m:r>
-                      <a:rPr lang="en-GB" b="0" i="1" noProof="0" smtClean="0">
+                      <a:rPr lang="en-GB" sz="2400" b="0" i="1" noProof="0" smtClean="0">
                         <a:latin typeface="Cambria Math" panose="02040503050406030204" pitchFamily="18" charset="0"/>
                         <a:cs typeface="Calibri" panose="020F0502020204030204" pitchFamily="34" charset="0"/>
                       </a:rPr>
                       <m:t>=</m:t>
                     </m:r>
                     <m:r>
-                      <a:rPr lang="en-GB" b="0" i="1" noProof="0" smtClean="0">
+                      <a:rPr lang="en-GB" sz="2400" b="0" i="1" noProof="0" smtClean="0">
                         <a:latin typeface="Cambria Math" panose="02040503050406030204" pitchFamily="18" charset="0"/>
                         <a:cs typeface="Calibri" panose="020F0502020204030204" pitchFamily="34" charset="0"/>
                       </a:rPr>
                       <m:t>𝑇</m:t>
                     </m:r>
                     <m:r>
-                      <a:rPr lang="en-GB" b="0" i="1" noProof="0" smtClean="0">
+                      <a:rPr lang="en-GB" sz="2400" b="0" i="1" noProof="0" smtClean="0">
                         <a:latin typeface="Cambria Math" panose="02040503050406030204" pitchFamily="18" charset="0"/>
                         <a:cs typeface="Calibri" panose="020F0502020204030204" pitchFamily="34" charset="0"/>
                       </a:rPr>
                       <m:t>+ </m:t>
                     </m:r>
                     <m:r>
-                      <a:rPr lang="en-GB" b="0" i="1" noProof="0" smtClean="0">
+                      <a:rPr lang="en-GB" sz="2400" b="0" i="1" noProof="0" smtClean="0">
                         <a:latin typeface="Cambria Math" panose="02040503050406030204" pitchFamily="18" charset="0"/>
                         <a:cs typeface="Calibri" panose="020F0502020204030204" pitchFamily="34" charset="0"/>
                       </a:rPr>
                       <m:t>𝑆</m:t>
                     </m:r>
                     <m:r>
-                      <a:rPr lang="en-GB" b="0" i="1" noProof="0" smtClean="0">
+                      <a:rPr lang="en-GB" sz="2400" b="0" i="1" noProof="0" smtClean="0">
                         <a:latin typeface="Cambria Math" panose="02040503050406030204" pitchFamily="18" charset="0"/>
                         <a:cs typeface="Calibri" panose="020F0502020204030204" pitchFamily="34" charset="0"/>
                       </a:rPr>
                       <m:t>+</m:t>
                     </m:r>
                     <m:r>
-                      <a:rPr lang="en-GB" b="0" i="1" noProof="0" smtClean="0">
+                      <a:rPr lang="en-GB" sz="2400" b="0" i="1" noProof="0" smtClean="0">
                         <a:latin typeface="Cambria Math" panose="02040503050406030204" pitchFamily="18" charset="0"/>
                         <a:cs typeface="Calibri" panose="020F0502020204030204" pitchFamily="34" charset="0"/>
                       </a:rPr>
@@ -32025,7 +32520,7 @@
                     </m:r>
                   </m:oMath>
                 </a14:m>
-                <a:endParaRPr lang="en-GB" b="0" i="1" noProof="0" dirty="0">
+                <a:endParaRPr lang="en-GB" sz="2400" b="0" i="1" noProof="0" dirty="0">
                   <a:latin typeface="Cambria Math" panose="02040503050406030204" pitchFamily="18" charset="0"/>
                   <a:cs typeface="Calibri" panose="020F0502020204030204" pitchFamily="34" charset="0"/>
                 </a:endParaRPr>
@@ -32035,28 +32530,28 @@
                 <a14:m>
                   <m:oMath xmlns:m="http://schemas.openxmlformats.org/officeDocument/2006/math">
                     <m:r>
-                      <a:rPr lang="en-GB" i="1" smtClean="0">
+                      <a:rPr lang="en-GB" sz="2400" i="1" smtClean="0">
                         <a:latin typeface="Cambria Math" panose="02040503050406030204" pitchFamily="18" charset="0"/>
                         <a:cs typeface="Calibri" panose="020F0502020204030204" pitchFamily="34" charset="0"/>
                       </a:rPr>
                       <m:t>𝑌</m:t>
                     </m:r>
                     <m:r>
-                      <a:rPr lang="en-GB" i="1" smtClean="0">
+                      <a:rPr lang="en-GB" sz="2400" i="1" smtClean="0">
                         <a:latin typeface="Cambria Math" panose="02040503050406030204" pitchFamily="18" charset="0"/>
                         <a:cs typeface="Calibri" panose="020F0502020204030204" pitchFamily="34" charset="0"/>
                       </a:rPr>
                       <m:t>=(</m:t>
                     </m:r>
                     <m:r>
-                      <a:rPr lang="en-GB" i="1" smtClean="0">
+                      <a:rPr lang="en-GB" sz="2400" i="1" smtClean="0">
                         <a:latin typeface="Cambria Math" panose="02040503050406030204" pitchFamily="18" charset="0"/>
                         <a:cs typeface="Calibri" panose="020F0502020204030204" pitchFamily="34" charset="0"/>
                       </a:rPr>
                       <m:t>𝑇</m:t>
                     </m:r>
                     <m:r>
-                      <a:rPr lang="en-GB" b="0" i="1" smtClean="0">
+                      <a:rPr lang="en-GB" sz="2400" b="0" i="1" smtClean="0">
                         <a:latin typeface="Cambria Math" panose="02040503050406030204" pitchFamily="18" charset="0"/>
                         <a:cs typeface="Calibri" panose="020F0502020204030204" pitchFamily="34" charset="0"/>
                       </a:rPr>
@@ -32065,7 +32560,7 @@
                     <m:sSub>
                       <m:sSubPr>
                         <m:ctrlPr>
-                          <a:rPr lang="en-GB" b="0" i="1" smtClean="0">
+                          <a:rPr lang="en-GB" sz="2400" b="0" i="1" smtClean="0">
                             <a:latin typeface="Cambria Math" panose="02040503050406030204" pitchFamily="18" charset="0"/>
                             <a:cs typeface="Calibri" panose="020F0502020204030204" pitchFamily="34" charset="0"/>
                           </a:rPr>
@@ -32073,7 +32568,7 @@
                       </m:sSubPr>
                       <m:e>
                         <m:r>
-                          <a:rPr lang="en-GB" b="0" i="1" smtClean="0">
+                          <a:rPr lang="en-GB" sz="2400" b="0" i="1" smtClean="0">
                             <a:latin typeface="Cambria Math" panose="02040503050406030204" pitchFamily="18" charset="0"/>
                             <a:cs typeface="Calibri" panose="020F0502020204030204" pitchFamily="34" charset="0"/>
                           </a:rPr>
@@ -32082,7 +32577,7 @@
                       </m:e>
                       <m:sub>
                         <m:r>
-                          <a:rPr lang="en-GB" b="0" i="1" smtClean="0">
+                          <a:rPr lang="en-GB" sz="2400" b="0" i="1" smtClean="0">
                             <a:latin typeface="Cambria Math" panose="02040503050406030204" pitchFamily="18" charset="0"/>
                             <a:cs typeface="Calibri" panose="020F0502020204030204" pitchFamily="34" charset="0"/>
                           </a:rPr>
@@ -32091,28 +32586,28 @@
                       </m:sub>
                     </m:sSub>
                     <m:r>
-                      <a:rPr lang="en-GB" b="0" i="1" smtClean="0">
+                      <a:rPr lang="en-GB" sz="2400" b="0" i="1" smtClean="0">
                         <a:latin typeface="Cambria Math" panose="02040503050406030204" pitchFamily="18" charset="0"/>
                         <a:cs typeface="Calibri" panose="020F0502020204030204" pitchFamily="34" charset="0"/>
                       </a:rPr>
                       <m:t>)</m:t>
                     </m:r>
                     <m:r>
-                      <a:rPr lang="en-GB" i="1" smtClean="0">
+                      <a:rPr lang="en-GB" sz="2400" i="1" smtClean="0">
                         <a:latin typeface="Cambria Math" panose="02040503050406030204" pitchFamily="18" charset="0"/>
                         <a:cs typeface="Calibri" panose="020F0502020204030204" pitchFamily="34" charset="0"/>
                       </a:rPr>
                       <m:t>+ </m:t>
                     </m:r>
                     <m:r>
-                      <a:rPr lang="en-GB" i="1" smtClean="0">
+                      <a:rPr lang="en-GB" sz="2400" i="1" smtClean="0">
                         <a:latin typeface="Cambria Math" panose="02040503050406030204" pitchFamily="18" charset="0"/>
                         <a:cs typeface="Calibri" panose="020F0502020204030204" pitchFamily="34" charset="0"/>
                       </a:rPr>
                       <m:t>𝑆</m:t>
                     </m:r>
                     <m:r>
-                      <a:rPr lang="en-GB" i="1" smtClean="0">
+                      <a:rPr lang="en-GB" sz="2400" i="1" smtClean="0">
                         <a:latin typeface="Cambria Math" panose="02040503050406030204" pitchFamily="18" charset="0"/>
                         <a:cs typeface="Calibri" panose="020F0502020204030204" pitchFamily="34" charset="0"/>
                       </a:rPr>
@@ -32121,7 +32616,7 @@
                     <m:sSub>
                       <m:sSubPr>
                         <m:ctrlPr>
-                          <a:rPr lang="en-GB" b="0" i="1" smtClean="0">
+                          <a:rPr lang="en-GB" sz="2400" b="0" i="1" smtClean="0">
                             <a:latin typeface="Cambria Math" panose="02040503050406030204" pitchFamily="18" charset="0"/>
                             <a:cs typeface="Calibri" panose="020F0502020204030204" pitchFamily="34" charset="0"/>
                           </a:rPr>
@@ -32129,7 +32624,7 @@
                       </m:sSubPr>
                       <m:e>
                         <m:r>
-                          <a:rPr lang="en-GB" b="0" i="1" smtClean="0">
+                          <a:rPr lang="en-GB" sz="2400" b="0" i="1" smtClean="0">
                             <a:latin typeface="Cambria Math" panose="02040503050406030204" pitchFamily="18" charset="0"/>
                             <a:cs typeface="Calibri" panose="020F0502020204030204" pitchFamily="34" charset="0"/>
                           </a:rPr>
@@ -32138,7 +32633,7 @@
                       </m:e>
                       <m:sub>
                         <m:r>
-                          <a:rPr lang="en-GB" b="0" i="1" smtClean="0">
+                          <a:rPr lang="en-GB" sz="2400" b="0" i="1" smtClean="0">
                             <a:latin typeface="Cambria Math" panose="02040503050406030204" pitchFamily="18" charset="0"/>
                             <a:cs typeface="Calibri" panose="020F0502020204030204" pitchFamily="34" charset="0"/>
                           </a:rPr>
@@ -32149,7 +32644,7 @@
                   </m:oMath>
                 </a14:m>
                 <a:r>
-                  <a:rPr lang="en-GB" i="1" dirty="0">
+                  <a:rPr lang="en-GB" sz="2400" i="1" dirty="0">
                     <a:latin typeface="Cambria Math" panose="02040503050406030204" pitchFamily="18" charset="0"/>
                     <a:cs typeface="Calibri" panose="020F0502020204030204" pitchFamily="34" charset="0"/>
                   </a:rPr>
@@ -32161,42 +32656,42 @@
                 <a14:m>
                   <m:oMath xmlns:m="http://schemas.openxmlformats.org/officeDocument/2006/math">
                     <m:r>
-                      <a:rPr lang="en-GB" i="1" smtClean="0">
+                      <a:rPr lang="en-GB" sz="2400" i="1" smtClean="0">
                         <a:latin typeface="Cambria Math" panose="02040503050406030204" pitchFamily="18" charset="0"/>
                         <a:cs typeface="Calibri" panose="020F0502020204030204" pitchFamily="34" charset="0"/>
                       </a:rPr>
                       <m:t>𝑌</m:t>
                     </m:r>
                     <m:r>
-                      <a:rPr lang="en-GB" i="1" smtClean="0">
+                      <a:rPr lang="en-GB" sz="2400" i="1" smtClean="0">
                         <a:latin typeface="Cambria Math" panose="02040503050406030204" pitchFamily="18" charset="0"/>
                         <a:cs typeface="Calibri" panose="020F0502020204030204" pitchFamily="34" charset="0"/>
                       </a:rPr>
                       <m:t>=</m:t>
                     </m:r>
                     <m:r>
-                      <a:rPr lang="en-GB" i="1" smtClean="0">
+                      <a:rPr lang="en-GB" sz="2400" i="1" smtClean="0">
                         <a:latin typeface="Cambria Math" panose="02040503050406030204" pitchFamily="18" charset="0"/>
                         <a:cs typeface="Calibri" panose="020F0502020204030204" pitchFamily="34" charset="0"/>
                       </a:rPr>
                       <m:t>𝑇</m:t>
                     </m:r>
                     <m:r>
-                      <a:rPr lang="en-GB" b="0" i="1" smtClean="0">
+                      <a:rPr lang="en-GB" sz="2400" b="0" i="1" smtClean="0">
                         <a:latin typeface="Cambria Math" panose="02040503050406030204" pitchFamily="18" charset="0"/>
                         <a:cs typeface="Calibri" panose="020F0502020204030204" pitchFamily="34" charset="0"/>
                       </a:rPr>
                       <m:t>+(</m:t>
                     </m:r>
                     <m:r>
-                      <a:rPr lang="en-GB" i="1" smtClean="0">
+                      <a:rPr lang="en-GB" sz="2400" i="1" smtClean="0">
                         <a:latin typeface="Cambria Math" panose="02040503050406030204" pitchFamily="18" charset="0"/>
                         <a:cs typeface="Calibri" panose="020F0502020204030204" pitchFamily="34" charset="0"/>
                       </a:rPr>
                       <m:t>𝑆</m:t>
                     </m:r>
                     <m:r>
-                      <a:rPr lang="en-GB" b="0" i="1" smtClean="0">
+                      <a:rPr lang="en-GB" sz="2400" b="0" i="1" smtClean="0">
                         <a:latin typeface="Cambria Math" panose="02040503050406030204" pitchFamily="18" charset="0"/>
                         <a:cs typeface="Calibri" panose="020F0502020204030204" pitchFamily="34" charset="0"/>
                       </a:rPr>
@@ -32205,7 +32700,7 @@
                     <m:sSub>
                       <m:sSubPr>
                         <m:ctrlPr>
-                          <a:rPr lang="en-GB" i="1" smtClean="0">
+                          <a:rPr lang="en-GB" sz="2400" i="1" smtClean="0">
                             <a:latin typeface="Cambria Math" panose="02040503050406030204" pitchFamily="18" charset="0"/>
                             <a:cs typeface="Calibri" panose="020F0502020204030204" pitchFamily="34" charset="0"/>
                           </a:rPr>
@@ -32213,7 +32708,7 @@
                       </m:sSubPr>
                       <m:e>
                         <m:r>
-                          <a:rPr lang="en-GB" i="1" smtClean="0">
+                          <a:rPr lang="en-GB" sz="2400" i="1" smtClean="0">
                             <a:latin typeface="Cambria Math" panose="02040503050406030204" pitchFamily="18" charset="0"/>
                             <a:cs typeface="Calibri" panose="020F0502020204030204" pitchFamily="34" charset="0"/>
                           </a:rPr>
@@ -32222,7 +32717,7 @@
                       </m:e>
                       <m:sub>
                         <m:r>
-                          <a:rPr lang="en-GB" i="1" smtClean="0">
+                          <a:rPr lang="en-GB" sz="2400" i="1" smtClean="0">
                             <a:latin typeface="Cambria Math" panose="02040503050406030204" pitchFamily="18" charset="0"/>
                             <a:cs typeface="Calibri" panose="020F0502020204030204" pitchFamily="34" charset="0"/>
                           </a:rPr>
@@ -32231,14 +32726,14 @@
                       </m:sub>
                     </m:sSub>
                     <m:r>
-                      <a:rPr lang="en-GB" b="0" i="1" smtClean="0">
+                      <a:rPr lang="en-GB" sz="2400" b="0" i="1" smtClean="0">
                         <a:latin typeface="Cambria Math" panose="02040503050406030204" pitchFamily="18" charset="0"/>
                         <a:cs typeface="Calibri" panose="020F0502020204030204" pitchFamily="34" charset="0"/>
                       </a:rPr>
                       <m:t>)</m:t>
                     </m:r>
                     <m:r>
-                      <a:rPr lang="en-GB" i="1" smtClean="0">
+                      <a:rPr lang="en-GB" sz="2400" i="1" smtClean="0">
                         <a:latin typeface="Cambria Math" panose="02040503050406030204" pitchFamily="18" charset="0"/>
                         <a:cs typeface="Calibri" panose="020F0502020204030204" pitchFamily="34" charset="0"/>
                       </a:rPr>
@@ -32247,7 +32742,7 @@
                     <m:sSub>
                       <m:sSubPr>
                         <m:ctrlPr>
-                          <a:rPr lang="en-GB" i="1" smtClean="0">
+                          <a:rPr lang="en-GB" sz="2400" i="1" smtClean="0">
                             <a:latin typeface="Cambria Math" panose="02040503050406030204" pitchFamily="18" charset="0"/>
                             <a:cs typeface="Calibri" panose="020F0502020204030204" pitchFamily="34" charset="0"/>
                           </a:rPr>
@@ -32255,7 +32750,7 @@
                       </m:sSubPr>
                       <m:e>
                         <m:r>
-                          <a:rPr lang="en-GB" i="1" smtClean="0">
+                          <a:rPr lang="en-GB" sz="2400" i="1" smtClean="0">
                             <a:latin typeface="Cambria Math" panose="02040503050406030204" pitchFamily="18" charset="0"/>
                             <a:cs typeface="Calibri" panose="020F0502020204030204" pitchFamily="34" charset="0"/>
                           </a:rPr>
@@ -32264,7 +32759,7 @@
                       </m:e>
                       <m:sub>
                         <m:r>
-                          <a:rPr lang="en-GB" i="1" smtClean="0">
+                          <a:rPr lang="en-GB" sz="2400" i="1" smtClean="0">
                             <a:latin typeface="Cambria Math" panose="02040503050406030204" pitchFamily="18" charset="0"/>
                             <a:cs typeface="Calibri" panose="020F0502020204030204" pitchFamily="34" charset="0"/>
                           </a:rPr>
@@ -32275,7 +32770,7 @@
                   </m:oMath>
                 </a14:m>
                 <a:r>
-                  <a:rPr lang="en-GB" i="1" dirty="0">
+                  <a:rPr lang="en-GB" sz="2400" i="1" dirty="0">
                     <a:latin typeface="Cambria Math" panose="02040503050406030204" pitchFamily="18" charset="0"/>
                     <a:cs typeface="Calibri" panose="020F0502020204030204" pitchFamily="34" charset="0"/>
                   </a:rPr>
@@ -32285,7 +32780,7 @@
               <a:p>
                 <a:pPr marL="342900" indent="-342900"/>
                 <a:r>
-                  <a:rPr lang="en-GB" i="1" dirty="0">
+                  <a:rPr lang="en-GB" sz="2400" i="1" dirty="0">
                     <a:latin typeface="Cambria Math" panose="02040503050406030204" pitchFamily="18" charset="0"/>
                     <a:cs typeface="Calibri" panose="020F0502020204030204" pitchFamily="34" charset="0"/>
                   </a:rPr>
@@ -32294,7 +32789,7 @@
               </a:p>
               <a:p>
                 <a:pPr marL="342900" indent="-342900"/>
-                <a:endParaRPr lang="en-GB" i="1" dirty="0">
+                <a:endParaRPr lang="en-GB" sz="2400" i="1" dirty="0">
                   <a:latin typeface="Cambria Math" panose="02040503050406030204" pitchFamily="18" charset="0"/>
                   <a:cs typeface="Calibri" panose="020F0502020204030204" pitchFamily="34" charset="0"/>
                 </a:endParaRPr>
@@ -32304,7 +32799,7 @@
                   <a:buNone/>
                 </a:pPr>
                 <a:r>
-                  <a:rPr lang="en-GB" i="1" dirty="0">
+                  <a:rPr lang="en-GB" sz="2400" i="1" dirty="0">
                     <a:latin typeface="Cambria Math" panose="02040503050406030204" pitchFamily="18" charset="0"/>
                     <a:cs typeface="Calibri" panose="020F0502020204030204" pitchFamily="34" charset="0"/>
                   </a:rPr>
@@ -32313,14 +32808,14 @@
               </a:p>
               <a:p>
                 <a:pPr marL="342900" indent="-342900"/>
-                <a:endParaRPr lang="en-GB" i="1" dirty="0">
+                <a:endParaRPr lang="en-GB" sz="2400" i="1" dirty="0">
                   <a:latin typeface="Cambria Math" panose="02040503050406030204" pitchFamily="18" charset="0"/>
                   <a:cs typeface="Calibri" panose="020F0502020204030204" pitchFamily="34" charset="0"/>
                 </a:endParaRPr>
               </a:p>
               <a:p>
                 <a:pPr marL="342900" indent="-342900"/>
-                <a:endParaRPr lang="en-GB" i="1" dirty="0">
+                <a:endParaRPr lang="en-GB" sz="2400" i="1" dirty="0">
                   <a:latin typeface="Cambria Math" panose="02040503050406030204" pitchFamily="18" charset="0"/>
                   <a:cs typeface="Calibri" panose="020F0502020204030204" pitchFamily="34" charset="0"/>
                 </a:endParaRPr>
@@ -32335,7 +32830,7 @@
             </p:txBody>
           </p:sp>
         </mc:Choice>
-        <mc:Fallback>
+        <mc:Fallback xmlns="">
           <p:sp>
             <p:nvSpPr>
               <p:cNvPr id="3" name="Content Placeholder 2">
@@ -32349,14 +32844,14 @@
                 <a:spLocks noGrp="1" noRot="1" noChangeAspect="1" noMove="1" noResize="1" noEditPoints="1" noAdjustHandles="1" noChangeArrowheads="1" noChangeShapeType="1" noTextEdit="1"/>
               </p:cNvSpPr>
               <p:nvPr>
-                <p:ph idx="1"/>
+                <p:ph sz="half" idx="2"/>
               </p:nvPr>
             </p:nvSpPr>
             <p:spPr>
               <a:blipFill>
                 <a:blip r:embed="rId2"/>
                 <a:stretch>
-                  <a:fillRect l="-928" t="-471"/>
+                  <a:fillRect l="-870" t="-1172"/>
                 </a:stretch>
               </a:blipFill>
             </p:spPr>
@@ -32388,10 +32883,15 @@
             <a:spLocks noGrp="1"/>
           </p:cNvSpPr>
           <p:nvPr>
-            <p:ph type="ftr" sz="quarter" idx="11"/>
+            <p:ph type="ftr" sz="quarter" idx="4294967295"/>
           </p:nvPr>
         </p:nvSpPr>
-        <p:spPr/>
+        <p:spPr>
+          <a:xfrm>
+            <a:off x="0" y="0"/>
+            <a:ext cx="0" cy="0"/>
+          </a:xfrm>
+        </p:spPr>
         <p:txBody>
           <a:bodyPr/>
           <a:lstStyle/>
@@ -32474,6 +32974,35 @@
       </p:sp>
       <p:sp>
         <p:nvSpPr>
+          <p:cNvPr id="4" name="Espace réservé du numéro de diapositive 3">
+            <a:extLst>
+              <a:ext uri="{FF2B5EF4-FFF2-40B4-BE49-F238E27FC236}">
+                <a16:creationId xmlns:a16="http://schemas.microsoft.com/office/drawing/2014/main" id="{FA280532-DADF-5F57-10B0-53EEAFE9FB08}"/>
+              </a:ext>
+            </a:extLst>
+          </p:cNvPr>
+          <p:cNvSpPr>
+            <a:spLocks noGrp="1"/>
+          </p:cNvSpPr>
+          <p:nvPr>
+            <p:ph type="sldNum" idx="12"/>
+          </p:nvPr>
+        </p:nvSpPr>
+        <p:spPr/>
+        <p:txBody>
+          <a:bodyPr/>
+          <a:lstStyle/>
+          <a:p>
+            <a:fld id="{1E1EA8E3-33CC-465E-BBDB-C5F5B41B1D80}" type="slidenum">
+              <a:rPr lang="en-GB" smtClean="0"/>
+              <a:t>8</a:t>
+            </a:fld>
+            <a:endParaRPr lang="en-GB"/>
+          </a:p>
+        </p:txBody>
+      </p:sp>
+      <p:sp>
+        <p:nvSpPr>
           <p:cNvPr id="3" name="Content Placeholder 2">
             <a:extLst>
               <a:ext uri="{FF2B5EF4-FFF2-40B4-BE49-F238E27FC236}">
@@ -32485,10 +33014,15 @@
             <a:spLocks noGrp="1"/>
           </p:cNvSpPr>
           <p:nvPr>
-            <p:ph idx="1"/>
+            <p:ph sz="half" idx="2"/>
           </p:nvPr>
         </p:nvSpPr>
-        <p:spPr/>
+        <p:spPr>
+          <a:xfrm>
+            <a:off x="970722" y="1850065"/>
+            <a:ext cx="10515597" cy="4246062"/>
+          </a:xfrm>
+        </p:spPr>
         <p:txBody>
           <a:bodyPr>
             <a:normAutofit/>
@@ -32497,7 +33031,7 @@
           <a:p>
             <a:pPr marL="342900" indent="-342900"/>
             <a:r>
-              <a:rPr lang="en-GB" dirty="0">
+              <a:rPr lang="en-GB" sz="2800" dirty="0">
                 <a:latin typeface="Calibri" panose="020F0502020204030204" pitchFamily="34" charset="0"/>
                 <a:cs typeface="Calibri" panose="020F0502020204030204" pitchFamily="34" charset="0"/>
               </a:rPr>
@@ -32507,7 +33041,7 @@
           <a:p>
             <a:pPr marL="342900" indent="-342900"/>
             <a:r>
-              <a:rPr lang="en-GB" dirty="0">
+              <a:rPr lang="en-GB" sz="2800" dirty="0">
                 <a:latin typeface="Calibri" panose="020F0502020204030204" pitchFamily="34" charset="0"/>
                 <a:cs typeface="Calibri" panose="020F0502020204030204" pitchFamily="34" charset="0"/>
               </a:rPr>
@@ -32517,21 +33051,17 @@
           <a:p>
             <a:pPr marL="342900" indent="-342900"/>
             <a:r>
-              <a:rPr lang="en-GB">
+              <a:rPr lang="en-GB" sz="2800" dirty="0">
                 <a:latin typeface="Calibri" panose="020F0502020204030204" pitchFamily="34" charset="0"/>
                 <a:cs typeface="Calibri" panose="020F0502020204030204" pitchFamily="34" charset="0"/>
               </a:rPr>
               <a:t>Explainable results</a:t>
             </a:r>
-            <a:endParaRPr lang="en-GB" dirty="0">
-              <a:latin typeface="Calibri" panose="020F0502020204030204" pitchFamily="34" charset="0"/>
-              <a:cs typeface="Calibri" panose="020F0502020204030204" pitchFamily="34" charset="0"/>
-            </a:endParaRPr>
           </a:p>
           <a:p>
             <a:pPr marL="342900" indent="-342900"/>
             <a:r>
-              <a:rPr lang="en-GB" dirty="0">
+              <a:rPr lang="en-GB" sz="2800" dirty="0">
                 <a:latin typeface="Calibri" panose="020F0502020204030204" pitchFamily="34" charset="0"/>
                 <a:cs typeface="Calibri" panose="020F0502020204030204" pitchFamily="34" charset="0"/>
               </a:rPr>
@@ -32541,7 +33071,7 @@
           <a:p>
             <a:pPr marL="342900" indent="-342900"/>
             <a:r>
-              <a:rPr lang="en-GB" noProof="0" dirty="0">
+              <a:rPr lang="en-GB" sz="2800" noProof="0" dirty="0">
                 <a:latin typeface="Calibri" panose="020F0502020204030204" pitchFamily="34" charset="0"/>
                 <a:cs typeface="Calibri" panose="020F0502020204030204" pitchFamily="34" charset="0"/>
               </a:rPr>
@@ -32563,10 +33093,15 @@
             <a:spLocks noGrp="1"/>
           </p:cNvSpPr>
           <p:nvPr>
-            <p:ph type="ftr" sz="quarter" idx="11"/>
+            <p:ph type="ftr" sz="quarter" idx="4294967295"/>
           </p:nvPr>
         </p:nvSpPr>
-        <p:spPr/>
+        <p:spPr>
+          <a:xfrm>
+            <a:off x="0" y="0"/>
+            <a:ext cx="0" cy="0"/>
+          </a:xfrm>
+        </p:spPr>
         <p:txBody>
           <a:bodyPr/>
           <a:lstStyle/>
@@ -32644,6 +33179,73 @@
       </p:sp>
       <p:sp>
         <p:nvSpPr>
+          <p:cNvPr id="3" name="Espace réservé du numéro de diapositive 2">
+            <a:extLst>
+              <a:ext uri="{FF2B5EF4-FFF2-40B4-BE49-F238E27FC236}">
+                <a16:creationId xmlns:a16="http://schemas.microsoft.com/office/drawing/2014/main" id="{2C9F1EEB-999D-04D4-EB47-FFEF720009F8}"/>
+              </a:ext>
+            </a:extLst>
+          </p:cNvPr>
+          <p:cNvSpPr>
+            <a:spLocks noGrp="1"/>
+          </p:cNvSpPr>
+          <p:nvPr>
+            <p:ph type="sldNum" idx="12"/>
+          </p:nvPr>
+        </p:nvSpPr>
+        <p:spPr>
+          <a:xfrm>
+            <a:off x="4490484" y="6079285"/>
+            <a:ext cx="2743200" cy="365125"/>
+          </a:xfrm>
+        </p:spPr>
+        <p:txBody>
+          <a:bodyPr/>
+          <a:lstStyle/>
+          <a:p>
+            <a:fld id="{1E1EA8E3-33CC-465E-BBDB-C5F5B41B1D80}" type="slidenum">
+              <a:rPr lang="en-GB" smtClean="0"/>
+              <a:t>9</a:t>
+            </a:fld>
+            <a:endParaRPr lang="en-GB"/>
+          </a:p>
+        </p:txBody>
+      </p:sp>
+      <p:sp>
+        <p:nvSpPr>
+          <p:cNvPr id="56" name="Footer Placeholder 55">
+            <a:extLst>
+              <a:ext uri="{FF2B5EF4-FFF2-40B4-BE49-F238E27FC236}">
+                <a16:creationId xmlns:a16="http://schemas.microsoft.com/office/drawing/2014/main" id="{5ECA7318-D064-E296-BA22-992B24A337FA}"/>
+              </a:ext>
+            </a:extLst>
+          </p:cNvPr>
+          <p:cNvSpPr>
+            <a:spLocks noGrp="1"/>
+          </p:cNvSpPr>
+          <p:nvPr>
+            <p:ph type="ftr" sz="quarter" idx="4294967295"/>
+          </p:nvPr>
+        </p:nvSpPr>
+        <p:spPr>
+          <a:xfrm>
+            <a:off x="0" y="0"/>
+            <a:ext cx="0" cy="0"/>
+          </a:xfrm>
+        </p:spPr>
+        <p:txBody>
+          <a:bodyPr/>
+          <a:lstStyle/>
+          <a:p>
+            <a:r>
+              <a:rPr lang="en-GB" noProof="0" dirty="0"/>
+              <a:t>ESTP Training. Seasonal adjustment</a:t>
+            </a:r>
+          </a:p>
+        </p:txBody>
+      </p:sp>
+      <p:sp>
+        <p:nvSpPr>
           <p:cNvPr id="5" name="Rectangle: Rounded Corners 4">
             <a:extLst>
               <a:ext uri="{FF2B5EF4-FFF2-40B4-BE49-F238E27FC236}">
@@ -32656,7 +33258,7 @@
         </p:nvSpPr>
         <p:spPr>
           <a:xfrm>
-            <a:off x="2518618" y="1708602"/>
+            <a:off x="2284702" y="1350556"/>
             <a:ext cx="2869035" cy="469783"/>
           </a:xfrm>
           <a:prstGeom prst="roundRect">
@@ -32705,7 +33307,7 @@
         </p:nvSpPr>
         <p:spPr>
           <a:xfrm>
-            <a:off x="8545227" y="1682116"/>
+            <a:off x="8311311" y="1324070"/>
             <a:ext cx="2869035" cy="469783"/>
           </a:xfrm>
           <a:prstGeom prst="roundRect">
@@ -32754,7 +33356,7 @@
         </p:nvSpPr>
         <p:spPr>
           <a:xfrm>
-            <a:off x="3472806" y="2702610"/>
+            <a:off x="3238890" y="2344564"/>
             <a:ext cx="1291131" cy="675315"/>
           </a:xfrm>
           <a:prstGeom prst="ellipse">
@@ -32801,7 +33403,7 @@
         </p:nvSpPr>
         <p:spPr>
           <a:xfrm>
-            <a:off x="3467916" y="3971812"/>
+            <a:off x="3234000" y="3613766"/>
             <a:ext cx="1296544" cy="675315"/>
           </a:xfrm>
           <a:prstGeom prst="roundRect">
@@ -32850,7 +33452,7 @@
         </p:nvSpPr>
         <p:spPr>
           <a:xfrm>
-            <a:off x="4768820" y="2690935"/>
+            <a:off x="4534904" y="2332889"/>
             <a:ext cx="1698814" cy="675315"/>
           </a:xfrm>
           <a:prstGeom prst="ellipse">
@@ -32897,7 +33499,7 @@
         </p:nvSpPr>
         <p:spPr>
           <a:xfrm>
-            <a:off x="380018" y="2714285"/>
+            <a:off x="146102" y="2356239"/>
             <a:ext cx="1449717" cy="675315"/>
           </a:xfrm>
           <a:prstGeom prst="ellipse">
@@ -32944,7 +33546,7 @@
         </p:nvSpPr>
         <p:spPr>
           <a:xfrm>
-            <a:off x="616688" y="4270578"/>
+            <a:off x="382772" y="3912532"/>
             <a:ext cx="974491" cy="675315"/>
           </a:xfrm>
           <a:prstGeom prst="roundRect">
@@ -32993,7 +33595,7 @@
         </p:nvSpPr>
         <p:spPr>
           <a:xfrm>
-            <a:off x="4947782" y="4010107"/>
+            <a:off x="4713866" y="3652061"/>
             <a:ext cx="1296544" cy="675315"/>
           </a:xfrm>
           <a:prstGeom prst="roundRect">
@@ -33046,7 +33648,7 @@
         </p:nvCxnSpPr>
         <p:spPr>
           <a:xfrm rot="16200000" flipH="1">
-            <a:off x="3773642" y="2357879"/>
+            <a:off x="3539726" y="1999833"/>
             <a:ext cx="524225" cy="165236"/>
           </a:xfrm>
           <a:prstGeom prst="bentConnector3">
@@ -33089,7 +33691,7 @@
         </p:nvCxnSpPr>
         <p:spPr>
           <a:xfrm rot="5400000">
-            <a:off x="2261057" y="1022206"/>
+            <a:off x="2027141" y="664160"/>
             <a:ext cx="535900" cy="2848259"/>
           </a:xfrm>
           <a:prstGeom prst="bentConnector3">
@@ -33134,7 +33736,7 @@
         </p:nvCxnSpPr>
         <p:spPr>
           <a:xfrm rot="16200000" flipH="1">
-            <a:off x="4529406" y="1602114"/>
+            <a:off x="4295490" y="1244068"/>
             <a:ext cx="512550" cy="1665091"/>
           </a:xfrm>
           <a:prstGeom prst="bentConnector3">
@@ -33173,7 +33775,7 @@
         </p:nvSpPr>
         <p:spPr>
           <a:xfrm>
-            <a:off x="7442624" y="2617345"/>
+            <a:off x="7208708" y="2259299"/>
             <a:ext cx="1862817" cy="675315"/>
           </a:xfrm>
           <a:prstGeom prst="ellipse">
@@ -33220,7 +33822,7 @@
         </p:nvSpPr>
         <p:spPr>
           <a:xfrm>
-            <a:off x="10313196" y="2622661"/>
+            <a:off x="10079280" y="2264615"/>
             <a:ext cx="1683391" cy="675315"/>
           </a:xfrm>
           <a:prstGeom prst="ellipse">
@@ -33271,7 +33873,7 @@
         </p:nvCxnSpPr>
         <p:spPr>
           <a:xfrm rot="5400000">
-            <a:off x="8944166" y="1581766"/>
+            <a:off x="8710250" y="1223720"/>
             <a:ext cx="465446" cy="1605712"/>
           </a:xfrm>
           <a:prstGeom prst="bentConnector3">
@@ -33316,7 +33918,7 @@
         </p:nvCxnSpPr>
         <p:spPr>
           <a:xfrm rot="16200000" flipH="1">
-            <a:off x="10331937" y="1799706"/>
+            <a:off x="10098021" y="1441660"/>
             <a:ext cx="470762" cy="1175147"/>
           </a:xfrm>
           <a:prstGeom prst="bentConnector3">
@@ -33361,7 +33963,7 @@
         </p:nvCxnSpPr>
         <p:spPr>
           <a:xfrm rot="5400000">
-            <a:off x="663917" y="3829618"/>
+            <a:off x="430001" y="3471572"/>
             <a:ext cx="880978" cy="943"/>
           </a:xfrm>
           <a:prstGeom prst="bentConnector3">
@@ -33406,7 +34008,7 @@
         </p:nvCxnSpPr>
         <p:spPr>
           <a:xfrm rot="5400000">
-            <a:off x="3820337" y="3673776"/>
+            <a:off x="3586421" y="3315730"/>
             <a:ext cx="593887" cy="2184"/>
           </a:xfrm>
           <a:prstGeom prst="bentConnector3">
@@ -33451,7 +34053,7 @@
         </p:nvCxnSpPr>
         <p:spPr>
           <a:xfrm rot="5400000">
-            <a:off x="5285213" y="3677092"/>
+            <a:off x="5051297" y="3319046"/>
             <a:ext cx="643857" cy="22173"/>
           </a:xfrm>
           <a:prstGeom prst="bentConnector3">
@@ -33492,7 +34094,7 @@
         </p:nvSpPr>
         <p:spPr>
           <a:xfrm>
-            <a:off x="6579257" y="3708565"/>
+            <a:off x="6345341" y="3350519"/>
             <a:ext cx="1876731" cy="805800"/>
           </a:xfrm>
           <a:prstGeom prst="roundRect">
@@ -33547,7 +34149,7 @@
         </p:nvSpPr>
         <p:spPr>
           <a:xfrm>
-            <a:off x="8514314" y="3708563"/>
+            <a:off x="8280398" y="3350517"/>
             <a:ext cx="1876737" cy="1720814"/>
           </a:xfrm>
           <a:prstGeom prst="roundRect">
@@ -33594,7 +34196,7 @@
         </p:nvSpPr>
         <p:spPr>
           <a:xfrm>
-            <a:off x="6579257" y="4779892"/>
+            <a:off x="6345341" y="4421846"/>
             <a:ext cx="1876737" cy="805800"/>
           </a:xfrm>
           <a:prstGeom prst="roundRect">
@@ -33647,7 +34249,7 @@
         </p:nvSpPr>
         <p:spPr>
           <a:xfrm>
-            <a:off x="8159984" y="5900138"/>
+            <a:off x="7926068" y="5542092"/>
             <a:ext cx="1876737" cy="805800"/>
           </a:xfrm>
           <a:prstGeom prst="roundRect">
@@ -33707,7 +34309,7 @@
         </p:nvSpPr>
         <p:spPr>
           <a:xfrm>
-            <a:off x="4965960" y="5346633"/>
+            <a:off x="4732044" y="4988587"/>
             <a:ext cx="1262507" cy="675315"/>
           </a:xfrm>
           <a:prstGeom prst="roundRect">
@@ -33763,7 +34365,7 @@
         </p:nvCxnSpPr>
         <p:spPr>
           <a:xfrm rot="5400000">
-            <a:off x="7737876" y="3072407"/>
+            <a:off x="7503960" y="2714361"/>
             <a:ext cx="415905" cy="856410"/>
           </a:xfrm>
           <a:prstGeom prst="bentConnector3">
@@ -33808,7 +34410,7 @@
         </p:nvCxnSpPr>
         <p:spPr>
           <a:xfrm rot="16200000" flipH="1">
-            <a:off x="8705407" y="2961286"/>
+            <a:off x="8471491" y="2603240"/>
             <a:ext cx="415903" cy="1078650"/>
           </a:xfrm>
           <a:prstGeom prst="bentConnector3">
@@ -33853,7 +34455,7 @@
         </p:nvCxnSpPr>
         <p:spPr>
           <a:xfrm rot="16200000" flipH="1">
-            <a:off x="7384861" y="4647126"/>
+            <a:off x="7150945" y="4289080"/>
             <a:ext cx="265527" cy="3"/>
           </a:xfrm>
           <a:prstGeom prst="bentConnector3">
@@ -33898,7 +34500,7 @@
         </p:nvCxnSpPr>
         <p:spPr>
           <a:xfrm rot="16200000" flipH="1">
-            <a:off x="5266029" y="5015447"/>
+            <a:off x="5032113" y="4657401"/>
             <a:ext cx="661211" cy="1160"/>
           </a:xfrm>
           <a:prstGeom prst="bentConnector3">
@@ -33943,7 +34545,7 @@
         </p:nvCxnSpPr>
         <p:spPr>
           <a:xfrm flipH="1">
-            <a:off x="9098353" y="5429377"/>
+            <a:off x="8864437" y="5071331"/>
             <a:ext cx="354330" cy="470761"/>
           </a:xfrm>
           <a:prstGeom prst="straightConnector1">
@@ -33986,7 +34588,7 @@
         </p:nvCxnSpPr>
         <p:spPr>
           <a:xfrm flipH="1">
-            <a:off x="5597214" y="4111465"/>
+            <a:off x="5363298" y="3753419"/>
             <a:ext cx="982043" cy="1235168"/>
           </a:xfrm>
           <a:prstGeom prst="straightConnector1">
@@ -34025,7 +34627,7 @@
         </p:nvSpPr>
         <p:spPr>
           <a:xfrm>
-            <a:off x="6111934" y="6063319"/>
+            <a:off x="5878018" y="5705273"/>
             <a:ext cx="1556070" cy="675315"/>
           </a:xfrm>
           <a:prstGeom prst="roundRect">
@@ -34083,7 +34685,7 @@
         </p:nvSpPr>
         <p:spPr>
           <a:xfrm>
-            <a:off x="10426214" y="5393619"/>
+            <a:off x="10192298" y="5035573"/>
             <a:ext cx="1191234" cy="838496"/>
           </a:xfrm>
           <a:prstGeom prst="roundRect">
@@ -34164,7 +34766,7 @@
         </p:nvCxnSpPr>
         <p:spPr>
           <a:xfrm flipH="1">
-            <a:off x="6889969" y="5585692"/>
+            <a:off x="6656053" y="5227646"/>
             <a:ext cx="627657" cy="477627"/>
           </a:xfrm>
           <a:prstGeom prst="straightConnector1">
@@ -34207,7 +34809,7 @@
         </p:nvCxnSpPr>
         <p:spPr>
           <a:xfrm>
-            <a:off x="10391051" y="4568970"/>
+            <a:off x="10157135" y="4210924"/>
             <a:ext cx="630780" cy="824649"/>
           </a:xfrm>
           <a:prstGeom prst="straightConnector1">
@@ -34250,7 +34852,7 @@
         </p:nvCxnSpPr>
         <p:spPr>
           <a:xfrm>
-            <a:off x="7517626" y="5585692"/>
+            <a:off x="7283710" y="5227646"/>
             <a:ext cx="1580727" cy="314446"/>
           </a:xfrm>
           <a:prstGeom prst="straightConnector1">
@@ -34293,7 +34895,7 @@
         </p:nvCxnSpPr>
         <p:spPr>
           <a:xfrm flipH="1">
-            <a:off x="7668004" y="6303038"/>
+            <a:off x="7434088" y="5944992"/>
             <a:ext cx="491980" cy="97939"/>
           </a:xfrm>
           <a:prstGeom prst="straightConnector1">
@@ -34337,7 +34939,7 @@
         </p:nvCxnSpPr>
         <p:spPr>
           <a:xfrm flipV="1">
-            <a:off x="10036721" y="5812867"/>
+            <a:off x="9802805" y="5454821"/>
             <a:ext cx="389493" cy="490171"/>
           </a:xfrm>
           <a:prstGeom prst="straightConnector1">
@@ -34365,34 +34967,6 @@
       </p:cxnSp>
       <p:sp>
         <p:nvSpPr>
-          <p:cNvPr id="56" name="Footer Placeholder 55">
-            <a:extLst>
-              <a:ext uri="{FF2B5EF4-FFF2-40B4-BE49-F238E27FC236}">
-                <a16:creationId xmlns:a16="http://schemas.microsoft.com/office/drawing/2014/main" id="{5ECA7318-D064-E296-BA22-992B24A337FA}"/>
-              </a:ext>
-            </a:extLst>
-          </p:cNvPr>
-          <p:cNvSpPr>
-            <a:spLocks noGrp="1"/>
-          </p:cNvSpPr>
-          <p:nvPr>
-            <p:ph type="ftr" sz="quarter" idx="11"/>
-          </p:nvPr>
-        </p:nvSpPr>
-        <p:spPr/>
-        <p:txBody>
-          <a:bodyPr/>
-          <a:lstStyle/>
-          <a:p>
-            <a:r>
-              <a:rPr lang="en-GB" noProof="0" dirty="0"/>
-              <a:t>ESTP Training. Seasonal adjustment</a:t>
-            </a:r>
-          </a:p>
-        </p:txBody>
-      </p:sp>
-      <p:sp>
-        <p:nvSpPr>
           <p:cNvPr id="61" name="Oval 9">
             <a:extLst>
               <a:ext uri="{FF2B5EF4-FFF2-40B4-BE49-F238E27FC236}">
@@ -34405,7 +34979,7 @@
         </p:nvSpPr>
         <p:spPr>
           <a:xfrm>
-            <a:off x="1949957" y="2694062"/>
+            <a:off x="1716041" y="2336016"/>
             <a:ext cx="1423693" cy="675315"/>
           </a:xfrm>
           <a:prstGeom prst="ellipse">
@@ -34452,7 +35026,7 @@
         </p:nvSpPr>
         <p:spPr>
           <a:xfrm>
-            <a:off x="1964423" y="3984222"/>
+            <a:off x="1730507" y="3626176"/>
             <a:ext cx="1407686" cy="675315"/>
           </a:xfrm>
           <a:prstGeom prst="roundRect">
@@ -34506,7 +35080,7 @@
         </p:nvCxnSpPr>
         <p:spPr>
           <a:xfrm rot="16200000" flipH="1">
-            <a:off x="2357613" y="3673568"/>
+            <a:off x="2123697" y="3315522"/>
             <a:ext cx="614845" cy="6462"/>
           </a:xfrm>
           <a:prstGeom prst="bentConnector3">
@@ -34551,7 +35125,7 @@
         </p:nvCxnSpPr>
         <p:spPr>
           <a:xfrm rot="5400000">
-            <a:off x="3049632" y="1790557"/>
+            <a:off x="2815716" y="1432511"/>
             <a:ext cx="515677" cy="1291332"/>
           </a:xfrm>
           <a:prstGeom prst="bentConnector3">
@@ -34592,7 +35166,7 @@
         </p:nvSpPr>
         <p:spPr>
           <a:xfrm>
-            <a:off x="11022622" y="3644268"/>
+            <a:off x="10788706" y="3286222"/>
             <a:ext cx="1191234" cy="838496"/>
           </a:xfrm>
           <a:prstGeom prst="roundRect">
@@ -34655,7 +35229,7 @@
         </p:nvCxnSpPr>
         <p:spPr>
           <a:xfrm>
-            <a:off x="11154892" y="3297976"/>
+            <a:off x="10920976" y="2939930"/>
             <a:ext cx="463347" cy="346292"/>
           </a:xfrm>
           <a:prstGeom prst="straightConnector1">
@@ -35565,15 +36139,6 @@
 </file>
 
 <file path=customXml/item1.xml><?xml version="1.0" encoding="utf-8"?>
-<?mso-contentType ?>
-<FormTemplates xmlns="http://schemas.microsoft.com/sharepoint/v3/contenttype/forms">
-  <Display>DocumentLibraryForm</Display>
-  <Edit>DocumentLibraryForm</Edit>
-  <New>DocumentLibraryForm</New>
-</FormTemplates>
-</file>
-
-<file path=customXml/item2.xml><?xml version="1.0" encoding="utf-8"?>
 <ct:contentTypeSchema xmlns:ct="http://schemas.microsoft.com/office/2006/metadata/contentType" xmlns:ma="http://schemas.microsoft.com/office/2006/metadata/properties/metaAttributes" ct:_="" ma:_="" ma:contentTypeName="Document" ma:contentTypeID="0x010100E6AA5C57F8EADE4E9CD6BB064C0C3195" ma:contentTypeVersion="16" ma:contentTypeDescription="Create a new document." ma:contentTypeScope="" ma:versionID="bb51c19a58f458ddcddd050a07659236">
   <xsd:schema xmlns:xsd="http://www.w3.org/2001/XMLSchema" xmlns:xs="http://www.w3.org/2001/XMLSchema" xmlns:p="http://schemas.microsoft.com/office/2006/metadata/properties" xmlns:ns2="0e422b70-e85d-4377-8ee0-b6227433d381" xmlns:ns3="199f642e-5af9-486c-ac06-f366742ef41a" targetNamespace="http://schemas.microsoft.com/office/2006/metadata/properties" ma:root="true" ma:fieldsID="0ee7a3bac0352a48a43420936abd968a" ns2:_="" ns3:_="">
     <xsd:import namespace="0e422b70-e85d-4377-8ee0-b6227433d381"/>
@@ -35814,7 +36379,7 @@
 </ct:contentTypeSchema>
 </file>
 
-<file path=customXml/item3.xml><?xml version="1.0" encoding="utf-8"?>
+<file path=customXml/item2.xml><?xml version="1.0" encoding="utf-8"?>
 <p:properties xmlns:p="http://schemas.microsoft.com/office/2006/metadata/properties" xmlns:xsi="http://www.w3.org/2001/XMLSchema-instance" xmlns:pc="http://schemas.microsoft.com/office/infopath/2007/PartnerControls">
   <documentManagement>
     <lcf76f155ced4ddcb4097134ff3c332f xmlns="0e422b70-e85d-4377-8ee0-b6227433d381">
@@ -35825,15 +36390,16 @@
 </p:properties>
 </file>
 
-<file path=customXml/itemProps1.xml><?xml version="1.0" encoding="utf-8"?>
-<ds:datastoreItem xmlns:ds="http://schemas.openxmlformats.org/officeDocument/2006/customXml" ds:itemID="{67DD9E9F-9EEB-4105-B29B-819486C2855A}">
-  <ds:schemaRefs>
-    <ds:schemaRef ds:uri="http://schemas.microsoft.com/sharepoint/v3/contenttype/forms"/>
-  </ds:schemaRefs>
-</ds:datastoreItem>
+<file path=customXml/item3.xml><?xml version="1.0" encoding="utf-8"?>
+<?mso-contentType ?>
+<FormTemplates xmlns="http://schemas.microsoft.com/sharepoint/v3/contenttype/forms">
+  <Display>DocumentLibraryForm</Display>
+  <Edit>DocumentLibraryForm</Edit>
+  <New>DocumentLibraryForm</New>
+</FormTemplates>
 </file>
 
-<file path=customXml/itemProps2.xml><?xml version="1.0" encoding="utf-8"?>
+<file path=customXml/itemProps1.xml><?xml version="1.0" encoding="utf-8"?>
 <ds:datastoreItem xmlns:ds="http://schemas.openxmlformats.org/officeDocument/2006/customXml" ds:itemID="{04B464EA-1576-49DD-9675-1E3399D4D196}">
   <ds:schemaRefs>
     <ds:schemaRef ds:uri="http://schemas.microsoft.com/office/2006/metadata/contentType"/>
@@ -35852,7 +36418,7 @@
 </ds:datastoreItem>
 </file>
 
-<file path=customXml/itemProps3.xml><?xml version="1.0" encoding="utf-8"?>
+<file path=customXml/itemProps2.xml><?xml version="1.0" encoding="utf-8"?>
 <ds:datastoreItem xmlns:ds="http://schemas.openxmlformats.org/officeDocument/2006/customXml" ds:itemID="{2D6C293B-B8B4-4284-A17E-9F9E4C32B25A}">
   <ds:schemaRefs>
     <ds:schemaRef ds:uri="http://schemas.microsoft.com/office/2006/documentManagement/types"/>
@@ -35867,4 +36433,12 @@
     <ds:schemaRef ds:uri="http://www.w3.org/XML/1998/namespace"/>
   </ds:schemaRefs>
 </ds:datastoreItem>
+</file>
+
+<file path=customXml/itemProps3.xml><?xml version="1.0" encoding="utf-8"?>
+<ds:datastoreItem xmlns:ds="http://schemas.openxmlformats.org/officeDocument/2006/customXml" ds:itemID="{67DD9E9F-9EEB-4105-B29B-819486C2855A}">
+  <ds:schemaRefs>
+    <ds:schemaRef ds:uri="http://schemas.microsoft.com/sharepoint/v3/contenttype/forms"/>
+  </ds:schemaRefs>
+</ds:datastoreItem>
 </file>